--- a/docs/20260430-nucleo-pin-configurations-l4-h2.pptx
+++ b/docs/20260430-nucleo-pin-configurations-l4-h2.pptx
@@ -259,7 +259,7 @@
           <a:p>
             <a:fld id="{B8B67C60-164F-4645-BD88-C03E7D28266F}" type="datetimeFigureOut">
               <a:rPr lang="en-US" smtClean="0"/>
-              <a:t>4/30/2026</a:t>
+              <a:t>5/7/2026</a:t>
             </a:fld>
             <a:endParaRPr lang="en-US"/>
           </a:p>
@@ -457,7 +457,7 @@
           <a:p>
             <a:fld id="{B8B67C60-164F-4645-BD88-C03E7D28266F}" type="datetimeFigureOut">
               <a:rPr lang="en-US" smtClean="0"/>
-              <a:t>4/30/2026</a:t>
+              <a:t>5/7/2026</a:t>
             </a:fld>
             <a:endParaRPr lang="en-US"/>
           </a:p>
@@ -665,7 +665,7 @@
           <a:p>
             <a:fld id="{B8B67C60-164F-4645-BD88-C03E7D28266F}" type="datetimeFigureOut">
               <a:rPr lang="en-US" smtClean="0"/>
-              <a:t>4/30/2026</a:t>
+              <a:t>5/7/2026</a:t>
             </a:fld>
             <a:endParaRPr lang="en-US"/>
           </a:p>
@@ -863,7 +863,7 @@
           <a:p>
             <a:fld id="{B8B67C60-164F-4645-BD88-C03E7D28266F}" type="datetimeFigureOut">
               <a:rPr lang="en-US" smtClean="0"/>
-              <a:t>4/30/2026</a:t>
+              <a:t>5/7/2026</a:t>
             </a:fld>
             <a:endParaRPr lang="en-US"/>
           </a:p>
@@ -1138,7 +1138,7 @@
           <a:p>
             <a:fld id="{B8B67C60-164F-4645-BD88-C03E7D28266F}" type="datetimeFigureOut">
               <a:rPr lang="en-US" smtClean="0"/>
-              <a:t>4/30/2026</a:t>
+              <a:t>5/7/2026</a:t>
             </a:fld>
             <a:endParaRPr lang="en-US"/>
           </a:p>
@@ -1403,7 +1403,7 @@
           <a:p>
             <a:fld id="{B8B67C60-164F-4645-BD88-C03E7D28266F}" type="datetimeFigureOut">
               <a:rPr lang="en-US" smtClean="0"/>
-              <a:t>4/30/2026</a:t>
+              <a:t>5/7/2026</a:t>
             </a:fld>
             <a:endParaRPr lang="en-US"/>
           </a:p>
@@ -1815,7 +1815,7 @@
           <a:p>
             <a:fld id="{B8B67C60-164F-4645-BD88-C03E7D28266F}" type="datetimeFigureOut">
               <a:rPr lang="en-US" smtClean="0"/>
-              <a:t>4/30/2026</a:t>
+              <a:t>5/7/2026</a:t>
             </a:fld>
             <a:endParaRPr lang="en-US"/>
           </a:p>
@@ -1956,7 +1956,7 @@
           <a:p>
             <a:fld id="{B8B67C60-164F-4645-BD88-C03E7D28266F}" type="datetimeFigureOut">
               <a:rPr lang="en-US" smtClean="0"/>
-              <a:t>4/30/2026</a:t>
+              <a:t>5/7/2026</a:t>
             </a:fld>
             <a:endParaRPr lang="en-US"/>
           </a:p>
@@ -2069,7 +2069,7 @@
           <a:p>
             <a:fld id="{B8B67C60-164F-4645-BD88-C03E7D28266F}" type="datetimeFigureOut">
               <a:rPr lang="en-US" smtClean="0"/>
-              <a:t>4/30/2026</a:t>
+              <a:t>5/7/2026</a:t>
             </a:fld>
             <a:endParaRPr lang="en-US"/>
           </a:p>
@@ -2380,7 +2380,7 @@
           <a:p>
             <a:fld id="{B8B67C60-164F-4645-BD88-C03E7D28266F}" type="datetimeFigureOut">
               <a:rPr lang="en-US" smtClean="0"/>
-              <a:t>4/30/2026</a:t>
+              <a:t>5/7/2026</a:t>
             </a:fld>
             <a:endParaRPr lang="en-US"/>
           </a:p>
@@ -2668,7 +2668,7 @@
           <a:p>
             <a:fld id="{B8B67C60-164F-4645-BD88-C03E7D28266F}" type="datetimeFigureOut">
               <a:rPr lang="en-US" smtClean="0"/>
-              <a:t>4/30/2026</a:t>
+              <a:t>5/7/2026</a:t>
             </a:fld>
             <a:endParaRPr lang="en-US"/>
           </a:p>
@@ -2909,7 +2909,7 @@
           <a:p>
             <a:fld id="{B8B67C60-164F-4645-BD88-C03E7D28266F}" type="datetimeFigureOut">
               <a:rPr lang="en-US" smtClean="0"/>
-              <a:t>4/30/2026</a:t>
+              <a:t>5/7/2026</a:t>
             </a:fld>
             <a:endParaRPr lang="en-US"/>
           </a:p>
@@ -4763,6 +4763,149 @@
               <a:rPr lang="en-US" dirty="0"/>
               <a:t>M</a:t>
             </a:r>
+          </a:p>
+        </p:txBody>
+      </p:sp>
+      <p:sp>
+        <p:nvSpPr>
+          <p:cNvPr id="3" name="Rectangle 2">
+            <a:extLst>
+              <a:ext uri="{FF2B5EF4-FFF2-40B4-BE49-F238E27FC236}">
+                <a16:creationId xmlns:a16="http://schemas.microsoft.com/office/drawing/2014/main" id="{033E6CF2-EF83-5344-6495-930092544660}"/>
+              </a:ext>
+            </a:extLst>
+          </p:cNvPr>
+          <p:cNvSpPr/>
+          <p:nvPr/>
+        </p:nvSpPr>
+        <p:spPr>
+          <a:xfrm>
+            <a:off x="9828874" y="2865223"/>
+            <a:ext cx="603600" cy="368120"/>
+          </a:xfrm>
+          <a:prstGeom prst="rect">
+            <a:avLst/>
+          </a:prstGeom>
+          <a:noFill/>
+          <a:ln w="38100">
+            <a:solidFill>
+              <a:schemeClr val="accent5"/>
+            </a:solidFill>
+            <a:prstDash val="dash"/>
+          </a:ln>
+        </p:spPr>
+        <p:style>
+          <a:lnRef idx="2">
+            <a:schemeClr val="accent1">
+              <a:shade val="15000"/>
+            </a:schemeClr>
+          </a:lnRef>
+          <a:fillRef idx="1">
+            <a:schemeClr val="accent1"/>
+          </a:fillRef>
+          <a:effectRef idx="0">
+            <a:schemeClr val="accent1"/>
+          </a:effectRef>
+          <a:fontRef idx="minor">
+            <a:schemeClr val="lt1"/>
+          </a:fontRef>
+        </p:style>
+        <p:txBody>
+          <a:bodyPr rtlCol="0" anchor="ctr"/>
+          <a:lstStyle/>
+          <a:p>
+            <a:pPr algn="ctr"/>
+            <a:endParaRPr lang="en-US"/>
+          </a:p>
+        </p:txBody>
+      </p:sp>
+      <p:sp>
+        <p:nvSpPr>
+          <p:cNvPr id="6" name="Rectangle 5">
+            <a:extLst>
+              <a:ext uri="{FF2B5EF4-FFF2-40B4-BE49-F238E27FC236}">
+                <a16:creationId xmlns:a16="http://schemas.microsoft.com/office/drawing/2014/main" id="{99AFE4DB-ABB8-59FD-6DD0-A9E753971187}"/>
+              </a:ext>
+            </a:extLst>
+          </p:cNvPr>
+          <p:cNvSpPr/>
+          <p:nvPr/>
+        </p:nvSpPr>
+        <p:spPr>
+          <a:xfrm>
+            <a:off x="6207707" y="3405290"/>
+            <a:ext cx="1481038" cy="1906497"/>
+          </a:xfrm>
+          <a:prstGeom prst="rect">
+            <a:avLst/>
+          </a:prstGeom>
+          <a:solidFill>
+            <a:schemeClr val="bg2">
+              <a:lumMod val="90000"/>
+            </a:schemeClr>
+          </a:solidFill>
+        </p:spPr>
+        <p:style>
+          <a:lnRef idx="2">
+            <a:schemeClr val="accent1">
+              <a:shade val="15000"/>
+            </a:schemeClr>
+          </a:lnRef>
+          <a:fillRef idx="1">
+            <a:schemeClr val="accent1"/>
+          </a:fillRef>
+          <a:effectRef idx="0">
+            <a:schemeClr val="accent1"/>
+          </a:effectRef>
+          <a:fontRef idx="minor">
+            <a:schemeClr val="lt1"/>
+          </a:fontRef>
+        </p:style>
+        <p:txBody>
+          <a:bodyPr rtlCol="0" anchor="ctr"/>
+          <a:lstStyle/>
+          <a:p>
+            <a:pPr algn="ctr"/>
+            <a:r>
+              <a:rPr lang="en-US" dirty="0"/>
+              <a:t>From Christoph add: </a:t>
+            </a:r>
+          </a:p>
+          <a:p>
+            <a:pPr algn="ctr"/>
+            <a:endParaRPr lang="en-US" dirty="0"/>
+          </a:p>
+          <a:p>
+            <a:pPr algn="ctr"/>
+            <a:r>
+              <a:rPr lang="en-US" dirty="0"/>
+              <a:t>D11 </a:t>
+            </a:r>
+            <a:r>
+              <a:rPr lang="en-US" dirty="0" err="1"/>
+              <a:t>stepSize</a:t>
+            </a:r>
+            <a:endParaRPr lang="en-US" dirty="0"/>
+          </a:p>
+          <a:p>
+            <a:pPr algn="ctr"/>
+            <a:r>
+              <a:rPr lang="en-US"/>
+              <a:t>D1</a:t>
+            </a:r>
+            <a:r>
+              <a:rPr lang="en-US" dirty="0"/>
+              <a:t>2</a:t>
+            </a:r>
+            <a:r>
+              <a:rPr lang="en-US"/>
+              <a:t> </a:t>
+            </a:r>
+            <a:r>
+              <a:rPr lang="en-US" dirty="0" err="1"/>
+              <a:t>calcTime</a:t>
+            </a:r>
+            <a:endParaRPr lang="en-US" dirty="0"/>
           </a:p>
         </p:txBody>
       </p:sp>

--- a/docs/20260430-nucleo-pin-configurations-l4-h2.pptx
+++ b/docs/20260430-nucleo-pin-configurations-l4-h2.pptx
@@ -4,8 +4,12 @@
   <p:sldMasterIdLst>
     <p:sldMasterId id="2147483648" r:id="rId1"/>
   </p:sldMasterIdLst>
+  <p:notesMasterIdLst>
+    <p:notesMasterId r:id="rId4"/>
+  </p:notesMasterIdLst>
   <p:sldIdLst>
     <p:sldId id="258" r:id="rId2"/>
+    <p:sldId id="259" r:id="rId3"/>
   </p:sldIdLst>
   <p:sldSz cx="12192000" cy="6858000"/>
   <p:notesSz cx="6858000" cy="9144000"/>
@@ -112,6 +116,547 @@
 </p:presentation>
 </file>
 
+<file path=ppt/notesMasters/notesMaster1.xml><?xml version="1.0" encoding="utf-8"?>
+<p:notesMaster xmlns:a="http://schemas.openxmlformats.org/drawingml/2006/main" xmlns:r="http://schemas.openxmlformats.org/officeDocument/2006/relationships" xmlns:p="http://schemas.openxmlformats.org/presentationml/2006/main">
+  <p:cSld>
+    <p:bg>
+      <p:bgRef idx="1001">
+        <a:schemeClr val="bg1"/>
+      </p:bgRef>
+    </p:bg>
+    <p:spTree>
+      <p:nvGrpSpPr>
+        <p:cNvPr id="1" name=""/>
+        <p:cNvGrpSpPr/>
+        <p:nvPr/>
+      </p:nvGrpSpPr>
+      <p:grpSpPr>
+        <a:xfrm>
+          <a:off x="0" y="0"/>
+          <a:ext cx="0" cy="0"/>
+          <a:chOff x="0" y="0"/>
+          <a:chExt cx="0" cy="0"/>
+        </a:xfrm>
+      </p:grpSpPr>
+      <p:sp>
+        <p:nvSpPr>
+          <p:cNvPr id="2" name="Header Placeholder 1"/>
+          <p:cNvSpPr>
+            <a:spLocks noGrp="1"/>
+          </p:cNvSpPr>
+          <p:nvPr>
+            <p:ph type="hdr" sz="quarter"/>
+          </p:nvPr>
+        </p:nvSpPr>
+        <p:spPr>
+          <a:xfrm>
+            <a:off x="0" y="0"/>
+            <a:ext cx="2971800" cy="458788"/>
+          </a:xfrm>
+          <a:prstGeom prst="rect">
+            <a:avLst/>
+          </a:prstGeom>
+        </p:spPr>
+        <p:txBody>
+          <a:bodyPr vert="horz" lIns="91440" tIns="45720" rIns="91440" bIns="45720" rtlCol="0"/>
+          <a:lstStyle>
+            <a:lvl1pPr algn="l">
+              <a:defRPr sz="1200"/>
+            </a:lvl1pPr>
+          </a:lstStyle>
+          <a:p>
+            <a:endParaRPr lang="en-US"/>
+          </a:p>
+        </p:txBody>
+      </p:sp>
+      <p:sp>
+        <p:nvSpPr>
+          <p:cNvPr id="3" name="Date Placeholder 2"/>
+          <p:cNvSpPr>
+            <a:spLocks noGrp="1"/>
+          </p:cNvSpPr>
+          <p:nvPr>
+            <p:ph type="dt" idx="1"/>
+          </p:nvPr>
+        </p:nvSpPr>
+        <p:spPr>
+          <a:xfrm>
+            <a:off x="3884613" y="0"/>
+            <a:ext cx="2971800" cy="458788"/>
+          </a:xfrm>
+          <a:prstGeom prst="rect">
+            <a:avLst/>
+          </a:prstGeom>
+        </p:spPr>
+        <p:txBody>
+          <a:bodyPr vert="horz" lIns="91440" tIns="45720" rIns="91440" bIns="45720" rtlCol="0"/>
+          <a:lstStyle>
+            <a:lvl1pPr algn="r">
+              <a:defRPr sz="1200"/>
+            </a:lvl1pPr>
+          </a:lstStyle>
+          <a:p>
+            <a:fld id="{82539491-0F25-4D6B-BCFC-C1CECD0BE112}" type="datetimeFigureOut">
+              <a:rPr lang="en-US" smtClean="0"/>
+              <a:t>5/13/2026</a:t>
+            </a:fld>
+            <a:endParaRPr lang="en-US"/>
+          </a:p>
+        </p:txBody>
+      </p:sp>
+      <p:sp>
+        <p:nvSpPr>
+          <p:cNvPr id="4" name="Slide Image Placeholder 3"/>
+          <p:cNvSpPr>
+            <a:spLocks noGrp="1" noRot="1" noChangeAspect="1"/>
+          </p:cNvSpPr>
+          <p:nvPr>
+            <p:ph type="sldImg" idx="2"/>
+          </p:nvPr>
+        </p:nvSpPr>
+        <p:spPr>
+          <a:xfrm>
+            <a:off x="685800" y="1143000"/>
+            <a:ext cx="5486400" cy="3086100"/>
+          </a:xfrm>
+          <a:prstGeom prst="rect">
+            <a:avLst/>
+          </a:prstGeom>
+          <a:noFill/>
+          <a:ln w="12700">
+            <a:solidFill>
+              <a:prstClr val="black"/>
+            </a:solidFill>
+          </a:ln>
+        </p:spPr>
+        <p:txBody>
+          <a:bodyPr vert="horz" lIns="91440" tIns="45720" rIns="91440" bIns="45720" rtlCol="0" anchor="ctr"/>
+          <a:lstStyle/>
+          <a:p>
+            <a:endParaRPr lang="en-US"/>
+          </a:p>
+        </p:txBody>
+      </p:sp>
+      <p:sp>
+        <p:nvSpPr>
+          <p:cNvPr id="5" name="Notes Placeholder 4"/>
+          <p:cNvSpPr>
+            <a:spLocks noGrp="1"/>
+          </p:cNvSpPr>
+          <p:nvPr>
+            <p:ph type="body" sz="quarter" idx="3"/>
+          </p:nvPr>
+        </p:nvSpPr>
+        <p:spPr>
+          <a:xfrm>
+            <a:off x="685800" y="4400550"/>
+            <a:ext cx="5486400" cy="3600450"/>
+          </a:xfrm>
+          <a:prstGeom prst="rect">
+            <a:avLst/>
+          </a:prstGeom>
+        </p:spPr>
+        <p:txBody>
+          <a:bodyPr vert="horz" lIns="91440" tIns="45720" rIns="91440" bIns="45720" rtlCol="0"/>
+          <a:lstStyle/>
+          <a:p>
+            <a:pPr lvl="0"/>
+            <a:r>
+              <a:rPr lang="en-US"/>
+              <a:t>Click to edit Master text styles</a:t>
+            </a:r>
+          </a:p>
+          <a:p>
+            <a:pPr lvl="1"/>
+            <a:r>
+              <a:rPr lang="en-US"/>
+              <a:t>Second level</a:t>
+            </a:r>
+          </a:p>
+          <a:p>
+            <a:pPr lvl="2"/>
+            <a:r>
+              <a:rPr lang="en-US"/>
+              <a:t>Third level</a:t>
+            </a:r>
+          </a:p>
+          <a:p>
+            <a:pPr lvl="3"/>
+            <a:r>
+              <a:rPr lang="en-US"/>
+              <a:t>Fourth level</a:t>
+            </a:r>
+          </a:p>
+          <a:p>
+            <a:pPr lvl="4"/>
+            <a:r>
+              <a:rPr lang="en-US"/>
+              <a:t>Fifth level</a:t>
+            </a:r>
+          </a:p>
+        </p:txBody>
+      </p:sp>
+      <p:sp>
+        <p:nvSpPr>
+          <p:cNvPr id="6" name="Footer Placeholder 5"/>
+          <p:cNvSpPr>
+            <a:spLocks noGrp="1"/>
+          </p:cNvSpPr>
+          <p:nvPr>
+            <p:ph type="ftr" sz="quarter" idx="4"/>
+          </p:nvPr>
+        </p:nvSpPr>
+        <p:spPr>
+          <a:xfrm>
+            <a:off x="0" y="8685213"/>
+            <a:ext cx="2971800" cy="458787"/>
+          </a:xfrm>
+          <a:prstGeom prst="rect">
+            <a:avLst/>
+          </a:prstGeom>
+        </p:spPr>
+        <p:txBody>
+          <a:bodyPr vert="horz" lIns="91440" tIns="45720" rIns="91440" bIns="45720" rtlCol="0" anchor="b"/>
+          <a:lstStyle>
+            <a:lvl1pPr algn="l">
+              <a:defRPr sz="1200"/>
+            </a:lvl1pPr>
+          </a:lstStyle>
+          <a:p>
+            <a:endParaRPr lang="en-US"/>
+          </a:p>
+        </p:txBody>
+      </p:sp>
+      <p:sp>
+        <p:nvSpPr>
+          <p:cNvPr id="7" name="Slide Number Placeholder 6"/>
+          <p:cNvSpPr>
+            <a:spLocks noGrp="1"/>
+          </p:cNvSpPr>
+          <p:nvPr>
+            <p:ph type="sldNum" sz="quarter" idx="5"/>
+          </p:nvPr>
+        </p:nvSpPr>
+        <p:spPr>
+          <a:xfrm>
+            <a:off x="3884613" y="8685213"/>
+            <a:ext cx="2971800" cy="458787"/>
+          </a:xfrm>
+          <a:prstGeom prst="rect">
+            <a:avLst/>
+          </a:prstGeom>
+        </p:spPr>
+        <p:txBody>
+          <a:bodyPr vert="horz" lIns="91440" tIns="45720" rIns="91440" bIns="45720" rtlCol="0" anchor="b"/>
+          <a:lstStyle>
+            <a:lvl1pPr algn="r">
+              <a:defRPr sz="1200"/>
+            </a:lvl1pPr>
+          </a:lstStyle>
+          <a:p>
+            <a:fld id="{3A1AFC2B-A538-4715-B7D1-5AE819649A5E}" type="slidenum">
+              <a:rPr lang="en-US" smtClean="0"/>
+              <a:t>‹#›</a:t>
+            </a:fld>
+            <a:endParaRPr lang="en-US"/>
+          </a:p>
+        </p:txBody>
+      </p:sp>
+    </p:spTree>
+    <p:extLst>
+      <p:ext uri="{BB962C8B-B14F-4D97-AF65-F5344CB8AC3E}">
+        <p14:creationId xmlns:p14="http://schemas.microsoft.com/office/powerpoint/2010/main" val="1617336232"/>
+      </p:ext>
+    </p:extLst>
+  </p:cSld>
+  <p:clrMap bg1="lt1" tx1="dk1" bg2="lt2" tx2="dk2" accent1="accent1" accent2="accent2" accent3="accent3" accent4="accent4" accent5="accent5" accent6="accent6" hlink="hlink" folHlink="folHlink"/>
+  <p:notesStyle>
+    <a:lvl1pPr marL="0" algn="l" defTabSz="914400" rtl="0" eaLnBrk="1" latinLnBrk="0" hangingPunct="1">
+      <a:defRPr sz="1200" kern="1200">
+        <a:solidFill>
+          <a:schemeClr val="tx1"/>
+        </a:solidFill>
+        <a:latin typeface="+mn-lt"/>
+        <a:ea typeface="+mn-ea"/>
+        <a:cs typeface="+mn-cs"/>
+      </a:defRPr>
+    </a:lvl1pPr>
+    <a:lvl2pPr marL="457200" algn="l" defTabSz="914400" rtl="0" eaLnBrk="1" latinLnBrk="0" hangingPunct="1">
+      <a:defRPr sz="1200" kern="1200">
+        <a:solidFill>
+          <a:schemeClr val="tx1"/>
+        </a:solidFill>
+        <a:latin typeface="+mn-lt"/>
+        <a:ea typeface="+mn-ea"/>
+        <a:cs typeface="+mn-cs"/>
+      </a:defRPr>
+    </a:lvl2pPr>
+    <a:lvl3pPr marL="914400" algn="l" defTabSz="914400" rtl="0" eaLnBrk="1" latinLnBrk="0" hangingPunct="1">
+      <a:defRPr sz="1200" kern="1200">
+        <a:solidFill>
+          <a:schemeClr val="tx1"/>
+        </a:solidFill>
+        <a:latin typeface="+mn-lt"/>
+        <a:ea typeface="+mn-ea"/>
+        <a:cs typeface="+mn-cs"/>
+      </a:defRPr>
+    </a:lvl3pPr>
+    <a:lvl4pPr marL="1371600" algn="l" defTabSz="914400" rtl="0" eaLnBrk="1" latinLnBrk="0" hangingPunct="1">
+      <a:defRPr sz="1200" kern="1200">
+        <a:solidFill>
+          <a:schemeClr val="tx1"/>
+        </a:solidFill>
+        <a:latin typeface="+mn-lt"/>
+        <a:ea typeface="+mn-ea"/>
+        <a:cs typeface="+mn-cs"/>
+      </a:defRPr>
+    </a:lvl4pPr>
+    <a:lvl5pPr marL="1828800" algn="l" defTabSz="914400" rtl="0" eaLnBrk="1" latinLnBrk="0" hangingPunct="1">
+      <a:defRPr sz="1200" kern="1200">
+        <a:solidFill>
+          <a:schemeClr val="tx1"/>
+        </a:solidFill>
+        <a:latin typeface="+mn-lt"/>
+        <a:ea typeface="+mn-ea"/>
+        <a:cs typeface="+mn-cs"/>
+      </a:defRPr>
+    </a:lvl5pPr>
+    <a:lvl6pPr marL="2286000" algn="l" defTabSz="914400" rtl="0" eaLnBrk="1" latinLnBrk="0" hangingPunct="1">
+      <a:defRPr sz="1200" kern="1200">
+        <a:solidFill>
+          <a:schemeClr val="tx1"/>
+        </a:solidFill>
+        <a:latin typeface="+mn-lt"/>
+        <a:ea typeface="+mn-ea"/>
+        <a:cs typeface="+mn-cs"/>
+      </a:defRPr>
+    </a:lvl6pPr>
+    <a:lvl7pPr marL="2743200" algn="l" defTabSz="914400" rtl="0" eaLnBrk="1" latinLnBrk="0" hangingPunct="1">
+      <a:defRPr sz="1200" kern="1200">
+        <a:solidFill>
+          <a:schemeClr val="tx1"/>
+        </a:solidFill>
+        <a:latin typeface="+mn-lt"/>
+        <a:ea typeface="+mn-ea"/>
+        <a:cs typeface="+mn-cs"/>
+      </a:defRPr>
+    </a:lvl7pPr>
+    <a:lvl8pPr marL="3200400" algn="l" defTabSz="914400" rtl="0" eaLnBrk="1" latinLnBrk="0" hangingPunct="1">
+      <a:defRPr sz="1200" kern="1200">
+        <a:solidFill>
+          <a:schemeClr val="tx1"/>
+        </a:solidFill>
+        <a:latin typeface="+mn-lt"/>
+        <a:ea typeface="+mn-ea"/>
+        <a:cs typeface="+mn-cs"/>
+      </a:defRPr>
+    </a:lvl8pPr>
+    <a:lvl9pPr marL="3657600" algn="l" defTabSz="914400" rtl="0" eaLnBrk="1" latinLnBrk="0" hangingPunct="1">
+      <a:defRPr sz="1200" kern="1200">
+        <a:solidFill>
+          <a:schemeClr val="tx1"/>
+        </a:solidFill>
+        <a:latin typeface="+mn-lt"/>
+        <a:ea typeface="+mn-ea"/>
+        <a:cs typeface="+mn-cs"/>
+      </a:defRPr>
+    </a:lvl9pPr>
+  </p:notesStyle>
+</p:notesMaster>
+</file>
+
+<file path=ppt/notesSlides/notesSlide1.xml><?xml version="1.0" encoding="utf-8"?>
+<p:notes xmlns:a="http://schemas.openxmlformats.org/drawingml/2006/main" xmlns:r="http://schemas.openxmlformats.org/officeDocument/2006/relationships" xmlns:p="http://schemas.openxmlformats.org/presentationml/2006/main">
+  <p:cSld>
+    <p:spTree>
+      <p:nvGrpSpPr>
+        <p:cNvPr id="1" name=""/>
+        <p:cNvGrpSpPr/>
+        <p:nvPr/>
+      </p:nvGrpSpPr>
+      <p:grpSpPr>
+        <a:xfrm>
+          <a:off x="0" y="0"/>
+          <a:ext cx="0" cy="0"/>
+          <a:chOff x="0" y="0"/>
+          <a:chExt cx="0" cy="0"/>
+        </a:xfrm>
+      </p:grpSpPr>
+      <p:sp>
+        <p:nvSpPr>
+          <p:cNvPr id="2" name="Slide Image Placeholder 1"/>
+          <p:cNvSpPr>
+            <a:spLocks noGrp="1" noRot="1" noChangeAspect="1"/>
+          </p:cNvSpPr>
+          <p:nvPr>
+            <p:ph type="sldImg"/>
+          </p:nvPr>
+        </p:nvSpPr>
+        <p:spPr/>
+      </p:sp>
+      <p:sp>
+        <p:nvSpPr>
+          <p:cNvPr id="3" name="Notes Placeholder 2"/>
+          <p:cNvSpPr>
+            <a:spLocks noGrp="1"/>
+          </p:cNvSpPr>
+          <p:nvPr>
+            <p:ph type="body" idx="1"/>
+          </p:nvPr>
+        </p:nvSpPr>
+        <p:spPr/>
+        <p:txBody>
+          <a:bodyPr/>
+          <a:lstStyle/>
+          <a:p>
+            <a:endParaRPr lang="en-US" dirty="0"/>
+          </a:p>
+        </p:txBody>
+      </p:sp>
+      <p:sp>
+        <p:nvSpPr>
+          <p:cNvPr id="4" name="Slide Number Placeholder 3"/>
+          <p:cNvSpPr>
+            <a:spLocks noGrp="1"/>
+          </p:cNvSpPr>
+          <p:nvPr>
+            <p:ph type="sldNum" sz="quarter" idx="5"/>
+          </p:nvPr>
+        </p:nvSpPr>
+        <p:spPr/>
+        <p:txBody>
+          <a:bodyPr/>
+          <a:lstStyle/>
+          <a:p>
+            <a:fld id="{3A1AFC2B-A538-4715-B7D1-5AE819649A5E}" type="slidenum">
+              <a:rPr lang="en-US" smtClean="0"/>
+              <a:t>1</a:t>
+            </a:fld>
+            <a:endParaRPr lang="en-US"/>
+          </a:p>
+        </p:txBody>
+      </p:sp>
+    </p:spTree>
+    <p:extLst>
+      <p:ext uri="{BB962C8B-B14F-4D97-AF65-F5344CB8AC3E}">
+        <p14:creationId xmlns:p14="http://schemas.microsoft.com/office/powerpoint/2010/main" val="523435176"/>
+      </p:ext>
+    </p:extLst>
+  </p:cSld>
+  <p:clrMapOvr>
+    <a:masterClrMapping/>
+  </p:clrMapOvr>
+</p:notes>
+</file>
+
+<file path=ppt/notesSlides/notesSlide2.xml><?xml version="1.0" encoding="utf-8"?>
+<p:notes xmlns:a="http://schemas.openxmlformats.org/drawingml/2006/main" xmlns:r="http://schemas.openxmlformats.org/officeDocument/2006/relationships" xmlns:p="http://schemas.openxmlformats.org/presentationml/2006/main">
+  <p:cSld>
+    <p:spTree>
+      <p:nvGrpSpPr>
+        <p:cNvPr id="1" name="">
+          <a:extLst>
+            <a:ext uri="{FF2B5EF4-FFF2-40B4-BE49-F238E27FC236}">
+              <a16:creationId xmlns:a16="http://schemas.microsoft.com/office/drawing/2014/main" id="{D45A4AD0-F9B4-FA32-A580-FA9859EABCC3}"/>
+            </a:ext>
+          </a:extLst>
+        </p:cNvPr>
+        <p:cNvGrpSpPr/>
+        <p:nvPr/>
+      </p:nvGrpSpPr>
+      <p:grpSpPr>
+        <a:xfrm>
+          <a:off x="0" y="0"/>
+          <a:ext cx="0" cy="0"/>
+          <a:chOff x="0" y="0"/>
+          <a:chExt cx="0" cy="0"/>
+        </a:xfrm>
+      </p:grpSpPr>
+      <p:sp>
+        <p:nvSpPr>
+          <p:cNvPr id="2" name="Slide Image Placeholder 1">
+            <a:extLst>
+              <a:ext uri="{FF2B5EF4-FFF2-40B4-BE49-F238E27FC236}">
+                <a16:creationId xmlns:a16="http://schemas.microsoft.com/office/drawing/2014/main" id="{48E9A5CF-6FA5-9AC3-61A1-81B0AFEAC460}"/>
+              </a:ext>
+            </a:extLst>
+          </p:cNvPr>
+          <p:cNvSpPr>
+            <a:spLocks noGrp="1" noRot="1" noChangeAspect="1"/>
+          </p:cNvSpPr>
+          <p:nvPr>
+            <p:ph type="sldImg"/>
+          </p:nvPr>
+        </p:nvSpPr>
+        <p:spPr/>
+      </p:sp>
+      <p:sp>
+        <p:nvSpPr>
+          <p:cNvPr id="3" name="Notes Placeholder 2">
+            <a:extLst>
+              <a:ext uri="{FF2B5EF4-FFF2-40B4-BE49-F238E27FC236}">
+                <a16:creationId xmlns:a16="http://schemas.microsoft.com/office/drawing/2014/main" id="{FA53C566-A0F1-20DB-CB86-A28467130674}"/>
+              </a:ext>
+            </a:extLst>
+          </p:cNvPr>
+          <p:cNvSpPr>
+            <a:spLocks noGrp="1"/>
+          </p:cNvSpPr>
+          <p:nvPr>
+            <p:ph type="body" idx="1"/>
+          </p:nvPr>
+        </p:nvSpPr>
+        <p:spPr/>
+        <p:txBody>
+          <a:bodyPr/>
+          <a:lstStyle/>
+          <a:p>
+            <a:endParaRPr lang="en-US" dirty="0"/>
+          </a:p>
+        </p:txBody>
+      </p:sp>
+      <p:sp>
+        <p:nvSpPr>
+          <p:cNvPr id="4" name="Slide Number Placeholder 3">
+            <a:extLst>
+              <a:ext uri="{FF2B5EF4-FFF2-40B4-BE49-F238E27FC236}">
+                <a16:creationId xmlns:a16="http://schemas.microsoft.com/office/drawing/2014/main" id="{83BE8732-3A9B-06E8-EF3D-F8C0FC1C133F}"/>
+              </a:ext>
+            </a:extLst>
+          </p:cNvPr>
+          <p:cNvSpPr>
+            <a:spLocks noGrp="1"/>
+          </p:cNvSpPr>
+          <p:nvPr>
+            <p:ph type="sldNum" sz="quarter" idx="5"/>
+          </p:nvPr>
+        </p:nvSpPr>
+        <p:spPr/>
+        <p:txBody>
+          <a:bodyPr/>
+          <a:lstStyle/>
+          <a:p>
+            <a:fld id="{3A1AFC2B-A538-4715-B7D1-5AE819649A5E}" type="slidenum">
+              <a:rPr lang="en-US" smtClean="0"/>
+              <a:t>2</a:t>
+            </a:fld>
+            <a:endParaRPr lang="en-US"/>
+          </a:p>
+        </p:txBody>
+      </p:sp>
+    </p:spTree>
+    <p:extLst>
+      <p:ext uri="{BB962C8B-B14F-4D97-AF65-F5344CB8AC3E}">
+        <p14:creationId xmlns:p14="http://schemas.microsoft.com/office/powerpoint/2010/main" val="1725306931"/>
+      </p:ext>
+    </p:extLst>
+  </p:cSld>
+  <p:clrMapOvr>
+    <a:masterClrMapping/>
+  </p:clrMapOvr>
+</p:notes>
+</file>
+
 <file path=ppt/slideLayouts/slideLayout1.xml><?xml version="1.0" encoding="utf-8"?>
 <p:sldLayout xmlns:a="http://schemas.openxmlformats.org/drawingml/2006/main" xmlns:r="http://schemas.openxmlformats.org/officeDocument/2006/relationships" xmlns:p="http://schemas.openxmlformats.org/presentationml/2006/main" type="title" preserve="1">
   <p:cSld name="Title Slide">
@@ -259,7 +804,7 @@
           <a:p>
             <a:fld id="{B8B67C60-164F-4645-BD88-C03E7D28266F}" type="datetimeFigureOut">
               <a:rPr lang="en-US" smtClean="0"/>
-              <a:t>5/7/2026</a:t>
+              <a:t>5/13/2026</a:t>
             </a:fld>
             <a:endParaRPr lang="en-US"/>
           </a:p>
@@ -457,7 +1002,7 @@
           <a:p>
             <a:fld id="{B8B67C60-164F-4645-BD88-C03E7D28266F}" type="datetimeFigureOut">
               <a:rPr lang="en-US" smtClean="0"/>
-              <a:t>5/7/2026</a:t>
+              <a:t>5/13/2026</a:t>
             </a:fld>
             <a:endParaRPr lang="en-US"/>
           </a:p>
@@ -665,7 +1210,7 @@
           <a:p>
             <a:fld id="{B8B67C60-164F-4645-BD88-C03E7D28266F}" type="datetimeFigureOut">
               <a:rPr lang="en-US" smtClean="0"/>
-              <a:t>5/7/2026</a:t>
+              <a:t>5/13/2026</a:t>
             </a:fld>
             <a:endParaRPr lang="en-US"/>
           </a:p>
@@ -863,7 +1408,7 @@
           <a:p>
             <a:fld id="{B8B67C60-164F-4645-BD88-C03E7D28266F}" type="datetimeFigureOut">
               <a:rPr lang="en-US" smtClean="0"/>
-              <a:t>5/7/2026</a:t>
+              <a:t>5/13/2026</a:t>
             </a:fld>
             <a:endParaRPr lang="en-US"/>
           </a:p>
@@ -1138,7 +1683,7 @@
           <a:p>
             <a:fld id="{B8B67C60-164F-4645-BD88-C03E7D28266F}" type="datetimeFigureOut">
               <a:rPr lang="en-US" smtClean="0"/>
-              <a:t>5/7/2026</a:t>
+              <a:t>5/13/2026</a:t>
             </a:fld>
             <a:endParaRPr lang="en-US"/>
           </a:p>
@@ -1403,7 +1948,7 @@
           <a:p>
             <a:fld id="{B8B67C60-164F-4645-BD88-C03E7D28266F}" type="datetimeFigureOut">
               <a:rPr lang="en-US" smtClean="0"/>
-              <a:t>5/7/2026</a:t>
+              <a:t>5/13/2026</a:t>
             </a:fld>
             <a:endParaRPr lang="en-US"/>
           </a:p>
@@ -1815,7 +2360,7 @@
           <a:p>
             <a:fld id="{B8B67C60-164F-4645-BD88-C03E7D28266F}" type="datetimeFigureOut">
               <a:rPr lang="en-US" smtClean="0"/>
-              <a:t>5/7/2026</a:t>
+              <a:t>5/13/2026</a:t>
             </a:fld>
             <a:endParaRPr lang="en-US"/>
           </a:p>
@@ -1956,7 +2501,7 @@
           <a:p>
             <a:fld id="{B8B67C60-164F-4645-BD88-C03E7D28266F}" type="datetimeFigureOut">
               <a:rPr lang="en-US" smtClean="0"/>
-              <a:t>5/7/2026</a:t>
+              <a:t>5/13/2026</a:t>
             </a:fld>
             <a:endParaRPr lang="en-US"/>
           </a:p>
@@ -2069,7 +2614,7 @@
           <a:p>
             <a:fld id="{B8B67C60-164F-4645-BD88-C03E7D28266F}" type="datetimeFigureOut">
               <a:rPr lang="en-US" smtClean="0"/>
-              <a:t>5/7/2026</a:t>
+              <a:t>5/13/2026</a:t>
             </a:fld>
             <a:endParaRPr lang="en-US"/>
           </a:p>
@@ -2380,7 +2925,7 @@
           <a:p>
             <a:fld id="{B8B67C60-164F-4645-BD88-C03E7D28266F}" type="datetimeFigureOut">
               <a:rPr lang="en-US" smtClean="0"/>
-              <a:t>5/7/2026</a:t>
+              <a:t>5/13/2026</a:t>
             </a:fld>
             <a:endParaRPr lang="en-US"/>
           </a:p>
@@ -2668,7 +3213,7 @@
           <a:p>
             <a:fld id="{B8B67C60-164F-4645-BD88-C03E7D28266F}" type="datetimeFigureOut">
               <a:rPr lang="en-US" smtClean="0"/>
-              <a:t>5/7/2026</a:t>
+              <a:t>5/13/2026</a:t>
             </a:fld>
             <a:endParaRPr lang="en-US"/>
           </a:p>
@@ -2909,7 +3454,7 @@
           <a:p>
             <a:fld id="{B8B67C60-164F-4645-BD88-C03E7D28266F}" type="datetimeFigureOut">
               <a:rPr lang="en-US" smtClean="0"/>
-              <a:t>5/7/2026</a:t>
+              <a:t>5/13/2026</a:t>
             </a:fld>
             <a:endParaRPr lang="en-US"/>
           </a:p>
@@ -3371,7 +3916,7 @@
           </p:nvPr>
         </p:nvPicPr>
         <p:blipFill>
-          <a:blip r:embed="rId2">
+          <a:blip r:embed="rId3">
             <a:extLst>
               <a:ext uri="{28A0092B-C50C-407E-A947-70E740481C1C}">
                 <a14:useLocalDpi xmlns:a14="http://schemas.microsoft.com/office/drawing/2010/main" val="0"/>
@@ -4833,7 +5378,7 @@
         </p:nvSpPr>
         <p:spPr>
           <a:xfrm>
-            <a:off x="6207707" y="3405290"/>
+            <a:off x="2077212" y="3101772"/>
             <a:ext cx="1481038" cy="1906497"/>
           </a:xfrm>
           <a:prstGeom prst="rect">
@@ -4909,10 +5454,2138 @@
           </a:p>
         </p:txBody>
       </p:sp>
+      <p:sp>
+        <p:nvSpPr>
+          <p:cNvPr id="4" name="Rectangle 3">
+            <a:extLst>
+              <a:ext uri="{FF2B5EF4-FFF2-40B4-BE49-F238E27FC236}">
+                <a16:creationId xmlns:a16="http://schemas.microsoft.com/office/drawing/2014/main" id="{596C16C7-5C21-0C06-1723-BF923814660E}"/>
+              </a:ext>
+            </a:extLst>
+          </p:cNvPr>
+          <p:cNvSpPr/>
+          <p:nvPr/>
+        </p:nvSpPr>
+        <p:spPr>
+          <a:xfrm>
+            <a:off x="2154971" y="5195209"/>
+            <a:ext cx="1231385" cy="243930"/>
+          </a:xfrm>
+          <a:prstGeom prst="rect">
+            <a:avLst/>
+          </a:prstGeom>
+          <a:solidFill>
+            <a:srgbClr val="BA592E"/>
+          </a:solidFill>
+        </p:spPr>
+        <p:style>
+          <a:lnRef idx="2">
+            <a:schemeClr val="accent1">
+              <a:shade val="15000"/>
+            </a:schemeClr>
+          </a:lnRef>
+          <a:fillRef idx="1">
+            <a:schemeClr val="accent1"/>
+          </a:fillRef>
+          <a:effectRef idx="0">
+            <a:schemeClr val="accent1"/>
+          </a:effectRef>
+          <a:fontRef idx="minor">
+            <a:schemeClr val="lt1"/>
+          </a:fontRef>
+        </p:style>
+        <p:txBody>
+          <a:bodyPr rtlCol="0" anchor="ctr"/>
+          <a:lstStyle/>
+          <a:p>
+            <a:r>
+              <a:rPr lang="en-US" sz="1400" dirty="0"/>
+              <a:t>D11: stepSize</a:t>
+            </a:r>
+          </a:p>
+        </p:txBody>
+      </p:sp>
+      <p:sp>
+        <p:nvSpPr>
+          <p:cNvPr id="7" name="Rectangle 6">
+            <a:extLst>
+              <a:ext uri="{FF2B5EF4-FFF2-40B4-BE49-F238E27FC236}">
+                <a16:creationId xmlns:a16="http://schemas.microsoft.com/office/drawing/2014/main" id="{AB1CC703-2F64-CCD9-ADF8-A484FFFCFB0A}"/>
+              </a:ext>
+            </a:extLst>
+          </p:cNvPr>
+          <p:cNvSpPr/>
+          <p:nvPr/>
+        </p:nvSpPr>
+        <p:spPr>
+          <a:xfrm>
+            <a:off x="2086024" y="5947279"/>
+            <a:ext cx="1300332" cy="243930"/>
+          </a:xfrm>
+          <a:prstGeom prst="rect">
+            <a:avLst/>
+          </a:prstGeom>
+          <a:solidFill>
+            <a:schemeClr val="bg2"/>
+          </a:solidFill>
+        </p:spPr>
+        <p:style>
+          <a:lnRef idx="2">
+            <a:schemeClr val="accent1">
+              <a:shade val="15000"/>
+            </a:schemeClr>
+          </a:lnRef>
+          <a:fillRef idx="1">
+            <a:schemeClr val="accent1"/>
+          </a:fillRef>
+          <a:effectRef idx="0">
+            <a:schemeClr val="accent1"/>
+          </a:effectRef>
+          <a:fontRef idx="minor">
+            <a:schemeClr val="lt1"/>
+          </a:fontRef>
+        </p:style>
+        <p:txBody>
+          <a:bodyPr rtlCol="0" anchor="ctr"/>
+          <a:lstStyle/>
+          <a:p>
+            <a:r>
+              <a:rPr lang="en-US" sz="1400" dirty="0">
+                <a:solidFill>
+                  <a:schemeClr val="tx1"/>
+                </a:solidFill>
+              </a:rPr>
+              <a:t>D12: calcTime</a:t>
+            </a:r>
+          </a:p>
+        </p:txBody>
+      </p:sp>
     </p:spTree>
     <p:extLst>
       <p:ext uri="{BB962C8B-B14F-4D97-AF65-F5344CB8AC3E}">
         <p14:creationId xmlns:p14="http://schemas.microsoft.com/office/powerpoint/2010/main" val="1582194773"/>
+      </p:ext>
+    </p:extLst>
+  </p:cSld>
+  <p:clrMapOvr>
+    <a:masterClrMapping/>
+  </p:clrMapOvr>
+</p:sld>
+</file>
+
+<file path=ppt/slides/slide2.xml><?xml version="1.0" encoding="utf-8"?>
+<p:sld xmlns:a="http://schemas.openxmlformats.org/drawingml/2006/main" xmlns:r="http://schemas.openxmlformats.org/officeDocument/2006/relationships" xmlns:p="http://schemas.openxmlformats.org/presentationml/2006/main">
+  <p:cSld>
+    <p:spTree>
+      <p:nvGrpSpPr>
+        <p:cNvPr id="1" name="">
+          <a:extLst>
+            <a:ext uri="{FF2B5EF4-FFF2-40B4-BE49-F238E27FC236}">
+              <a16:creationId xmlns:a16="http://schemas.microsoft.com/office/drawing/2014/main" id="{912527AC-B81E-647E-C5F8-D54743DE9403}"/>
+            </a:ext>
+          </a:extLst>
+        </p:cNvPr>
+        <p:cNvGrpSpPr/>
+        <p:nvPr/>
+      </p:nvGrpSpPr>
+      <p:grpSpPr>
+        <a:xfrm>
+          <a:off x="0" y="0"/>
+          <a:ext cx="0" cy="0"/>
+          <a:chOff x="0" y="0"/>
+          <a:chExt cx="0" cy="0"/>
+        </a:xfrm>
+      </p:grpSpPr>
+      <p:pic>
+        <p:nvPicPr>
+          <p:cNvPr id="17" name="Picture 16">
+            <a:extLst>
+              <a:ext uri="{FF2B5EF4-FFF2-40B4-BE49-F238E27FC236}">
+                <a16:creationId xmlns:a16="http://schemas.microsoft.com/office/drawing/2014/main" id="{AA94E78D-D157-1E6B-B8CD-2AFE3A7DDB27}"/>
+              </a:ext>
+            </a:extLst>
+          </p:cNvPr>
+          <p:cNvPicPr>
+            <a:picLocks noChangeAspect="1"/>
+          </p:cNvPicPr>
+          <p:nvPr/>
+        </p:nvPicPr>
+        <p:blipFill>
+          <a:blip r:embed="rId3">
+            <a:extLst>
+              <a:ext uri="{28A0092B-C50C-407E-A947-70E740481C1C}">
+                <a14:useLocalDpi xmlns:a14="http://schemas.microsoft.com/office/drawing/2010/main" val="0"/>
+              </a:ext>
+            </a:extLst>
+          </a:blip>
+          <a:srcRect l="13289" r="14488" b="1501"/>
+          <a:stretch>
+            <a:fillRect/>
+          </a:stretch>
+        </p:blipFill>
+        <p:spPr>
+          <a:xfrm>
+            <a:off x="3328008" y="0"/>
+            <a:ext cx="6689203" cy="6755027"/>
+          </a:xfrm>
+          <a:prstGeom prst="rect">
+            <a:avLst/>
+          </a:prstGeom>
+        </p:spPr>
+      </p:pic>
+      <p:sp>
+        <p:nvSpPr>
+          <p:cNvPr id="8" name="Rectangle 7">
+            <a:extLst>
+              <a:ext uri="{FF2B5EF4-FFF2-40B4-BE49-F238E27FC236}">
+                <a16:creationId xmlns:a16="http://schemas.microsoft.com/office/drawing/2014/main" id="{A47DEB5B-CA05-9F41-B218-47316A8FB40A}"/>
+              </a:ext>
+            </a:extLst>
+          </p:cNvPr>
+          <p:cNvSpPr/>
+          <p:nvPr/>
+        </p:nvSpPr>
+        <p:spPr>
+          <a:xfrm>
+            <a:off x="5473964" y="2439481"/>
+            <a:ext cx="562846" cy="192505"/>
+          </a:xfrm>
+          <a:prstGeom prst="rect">
+            <a:avLst/>
+          </a:prstGeom>
+          <a:solidFill>
+            <a:schemeClr val="tx1"/>
+          </a:solidFill>
+        </p:spPr>
+        <p:style>
+          <a:lnRef idx="2">
+            <a:schemeClr val="accent1">
+              <a:shade val="15000"/>
+            </a:schemeClr>
+          </a:lnRef>
+          <a:fillRef idx="1">
+            <a:schemeClr val="accent1"/>
+          </a:fillRef>
+          <a:effectRef idx="0">
+            <a:schemeClr val="accent1"/>
+          </a:effectRef>
+          <a:fontRef idx="minor">
+            <a:schemeClr val="lt1"/>
+          </a:fontRef>
+        </p:style>
+        <p:txBody>
+          <a:bodyPr rtlCol="0" anchor="ctr"/>
+          <a:lstStyle/>
+          <a:p>
+            <a:pPr algn="ctr"/>
+            <a:r>
+              <a:rPr lang="en-US" sz="1200" dirty="0"/>
+              <a:t>GND</a:t>
+            </a:r>
+          </a:p>
+        </p:txBody>
+      </p:sp>
+      <p:sp>
+        <p:nvSpPr>
+          <p:cNvPr id="9" name="Rectangle 8">
+            <a:extLst>
+              <a:ext uri="{FF2B5EF4-FFF2-40B4-BE49-F238E27FC236}">
+                <a16:creationId xmlns:a16="http://schemas.microsoft.com/office/drawing/2014/main" id="{44102751-FFD4-C7AD-7777-5FDBCE37C6DE}"/>
+              </a:ext>
+            </a:extLst>
+          </p:cNvPr>
+          <p:cNvSpPr/>
+          <p:nvPr/>
+        </p:nvSpPr>
+        <p:spPr>
+          <a:xfrm>
+            <a:off x="7258289" y="2418458"/>
+            <a:ext cx="581819" cy="192505"/>
+          </a:xfrm>
+          <a:prstGeom prst="rect">
+            <a:avLst/>
+          </a:prstGeom>
+          <a:solidFill>
+            <a:schemeClr val="tx1"/>
+          </a:solidFill>
+        </p:spPr>
+        <p:style>
+          <a:lnRef idx="2">
+            <a:schemeClr val="accent1">
+              <a:shade val="15000"/>
+            </a:schemeClr>
+          </a:lnRef>
+          <a:fillRef idx="1">
+            <a:schemeClr val="accent1"/>
+          </a:fillRef>
+          <a:effectRef idx="0">
+            <a:schemeClr val="accent1"/>
+          </a:effectRef>
+          <a:fontRef idx="minor">
+            <a:schemeClr val="lt1"/>
+          </a:fontRef>
+        </p:style>
+        <p:txBody>
+          <a:bodyPr rtlCol="0" anchor="ctr"/>
+          <a:lstStyle/>
+          <a:p>
+            <a:pPr algn="ctr"/>
+            <a:r>
+              <a:rPr lang="en-US" sz="1200" dirty="0"/>
+              <a:t>GND</a:t>
+            </a:r>
+          </a:p>
+        </p:txBody>
+      </p:sp>
+      <p:sp>
+        <p:nvSpPr>
+          <p:cNvPr id="10" name="Rectangle 9">
+            <a:extLst>
+              <a:ext uri="{FF2B5EF4-FFF2-40B4-BE49-F238E27FC236}">
+                <a16:creationId xmlns:a16="http://schemas.microsoft.com/office/drawing/2014/main" id="{E205294D-606E-EAFC-D066-969A78CF986E}"/>
+              </a:ext>
+            </a:extLst>
+          </p:cNvPr>
+          <p:cNvSpPr/>
+          <p:nvPr/>
+        </p:nvSpPr>
+        <p:spPr>
+          <a:xfrm>
+            <a:off x="9144150" y="4103062"/>
+            <a:ext cx="774717" cy="374870"/>
+          </a:xfrm>
+          <a:prstGeom prst="rect">
+            <a:avLst/>
+          </a:prstGeom>
+          <a:solidFill>
+            <a:srgbClr val="D5B65D"/>
+          </a:solidFill>
+        </p:spPr>
+        <p:style>
+          <a:lnRef idx="2">
+            <a:schemeClr val="accent1">
+              <a:shade val="15000"/>
+            </a:schemeClr>
+          </a:lnRef>
+          <a:fillRef idx="1">
+            <a:schemeClr val="accent1"/>
+          </a:fillRef>
+          <a:effectRef idx="0">
+            <a:schemeClr val="accent1"/>
+          </a:effectRef>
+          <a:fontRef idx="minor">
+            <a:schemeClr val="lt1"/>
+          </a:fontRef>
+        </p:style>
+        <p:txBody>
+          <a:bodyPr rtlCol="0" anchor="ctr"/>
+          <a:lstStyle/>
+          <a:p>
+            <a:pPr algn="ctr"/>
+            <a:r>
+              <a:rPr lang="en-US" sz="1200" dirty="0"/>
+              <a:t>D13: w (out)</a:t>
+            </a:r>
+          </a:p>
+        </p:txBody>
+      </p:sp>
+      <p:sp>
+        <p:nvSpPr>
+          <p:cNvPr id="11" name="Rectangle 10">
+            <a:extLst>
+              <a:ext uri="{FF2B5EF4-FFF2-40B4-BE49-F238E27FC236}">
+                <a16:creationId xmlns:a16="http://schemas.microsoft.com/office/drawing/2014/main" id="{7A4EB4BC-034C-E969-75BE-FF36E4B19ED1}"/>
+              </a:ext>
+            </a:extLst>
+          </p:cNvPr>
+          <p:cNvSpPr/>
+          <p:nvPr/>
+        </p:nvSpPr>
+        <p:spPr>
+          <a:xfrm>
+            <a:off x="6891019" y="1505253"/>
+            <a:ext cx="487434" cy="208548"/>
+          </a:xfrm>
+          <a:prstGeom prst="rect">
+            <a:avLst/>
+          </a:prstGeom>
+          <a:solidFill>
+            <a:srgbClr val="D5B65D"/>
+          </a:solidFill>
+        </p:spPr>
+        <p:style>
+          <a:lnRef idx="2">
+            <a:schemeClr val="accent1">
+              <a:shade val="15000"/>
+            </a:schemeClr>
+          </a:lnRef>
+          <a:fillRef idx="1">
+            <a:schemeClr val="accent1"/>
+          </a:fillRef>
+          <a:effectRef idx="0">
+            <a:schemeClr val="accent1"/>
+          </a:effectRef>
+          <a:fontRef idx="minor">
+            <a:schemeClr val="lt1"/>
+          </a:fontRef>
+        </p:style>
+        <p:txBody>
+          <a:bodyPr rtlCol="0" anchor="ctr"/>
+          <a:lstStyle/>
+          <a:p>
+            <a:pPr algn="ctr"/>
+            <a:r>
+              <a:rPr lang="en-US" sz="1200" dirty="0"/>
+              <a:t>C1</a:t>
+            </a:r>
+          </a:p>
+        </p:txBody>
+      </p:sp>
+      <p:sp>
+        <p:nvSpPr>
+          <p:cNvPr id="12" name="Rectangle 11">
+            <a:extLst>
+              <a:ext uri="{FF2B5EF4-FFF2-40B4-BE49-F238E27FC236}">
+                <a16:creationId xmlns:a16="http://schemas.microsoft.com/office/drawing/2014/main" id="{757BCEBB-124D-C1E6-D92D-53D6A22E4FF5}"/>
+              </a:ext>
+            </a:extLst>
+          </p:cNvPr>
+          <p:cNvSpPr/>
+          <p:nvPr/>
+        </p:nvSpPr>
+        <p:spPr>
+          <a:xfrm>
+            <a:off x="6158026" y="1736914"/>
+            <a:ext cx="487434" cy="208548"/>
+          </a:xfrm>
+          <a:prstGeom prst="rect">
+            <a:avLst/>
+          </a:prstGeom>
+          <a:solidFill>
+            <a:srgbClr val="3E7F83"/>
+          </a:solidFill>
+        </p:spPr>
+        <p:style>
+          <a:lnRef idx="2">
+            <a:schemeClr val="accent1">
+              <a:shade val="15000"/>
+            </a:schemeClr>
+          </a:lnRef>
+          <a:fillRef idx="1">
+            <a:schemeClr val="accent1"/>
+          </a:fillRef>
+          <a:effectRef idx="0">
+            <a:schemeClr val="accent1"/>
+          </a:effectRef>
+          <a:fontRef idx="minor">
+            <a:schemeClr val="lt1"/>
+          </a:fontRef>
+        </p:style>
+        <p:txBody>
+          <a:bodyPr rtlCol="0" anchor="ctr"/>
+          <a:lstStyle/>
+          <a:p>
+            <a:pPr algn="ctr"/>
+            <a:r>
+              <a:rPr lang="en-US" sz="1200" dirty="0"/>
+              <a:t>C2</a:t>
+            </a:r>
+          </a:p>
+        </p:txBody>
+      </p:sp>
+      <p:sp>
+        <p:nvSpPr>
+          <p:cNvPr id="13" name="Rectangle 12">
+            <a:extLst>
+              <a:ext uri="{FF2B5EF4-FFF2-40B4-BE49-F238E27FC236}">
+                <a16:creationId xmlns:a16="http://schemas.microsoft.com/office/drawing/2014/main" id="{7C7938C7-53F7-83F5-EDFF-654AD3E760E3}"/>
+              </a:ext>
+            </a:extLst>
+          </p:cNvPr>
+          <p:cNvSpPr/>
+          <p:nvPr/>
+        </p:nvSpPr>
+        <p:spPr>
+          <a:xfrm rot="19167733">
+            <a:off x="8320592" y="3832845"/>
+            <a:ext cx="937121" cy="243930"/>
+          </a:xfrm>
+          <a:prstGeom prst="rect">
+            <a:avLst/>
+          </a:prstGeom>
+          <a:solidFill>
+            <a:srgbClr val="3E7F83"/>
+          </a:solidFill>
+        </p:spPr>
+        <p:style>
+          <a:lnRef idx="2">
+            <a:schemeClr val="accent1">
+              <a:shade val="15000"/>
+            </a:schemeClr>
+          </a:lnRef>
+          <a:fillRef idx="1">
+            <a:schemeClr val="accent1"/>
+          </a:fillRef>
+          <a:effectRef idx="0">
+            <a:schemeClr val="accent1"/>
+          </a:effectRef>
+          <a:fontRef idx="minor">
+            <a:schemeClr val="lt1"/>
+          </a:fontRef>
+        </p:style>
+        <p:txBody>
+          <a:bodyPr rtlCol="0" anchor="ctr"/>
+          <a:lstStyle/>
+          <a:p>
+            <a:pPr algn="ctr"/>
+            <a:r>
+              <a:rPr lang="en-US" sz="1200" dirty="0"/>
+              <a:t>A0: vf (in)</a:t>
+            </a:r>
+          </a:p>
+        </p:txBody>
+      </p:sp>
+      <p:sp>
+        <p:nvSpPr>
+          <p:cNvPr id="15" name="Rectangle 14">
+            <a:extLst>
+              <a:ext uri="{FF2B5EF4-FFF2-40B4-BE49-F238E27FC236}">
+                <a16:creationId xmlns:a16="http://schemas.microsoft.com/office/drawing/2014/main" id="{D45C2433-DA73-1C72-FECD-00CDD56C552C}"/>
+              </a:ext>
+            </a:extLst>
+          </p:cNvPr>
+          <p:cNvSpPr/>
+          <p:nvPr/>
+        </p:nvSpPr>
+        <p:spPr>
+          <a:xfrm>
+            <a:off x="5850239" y="951214"/>
+            <a:ext cx="2564525" cy="303410"/>
+          </a:xfrm>
+          <a:prstGeom prst="rect">
+            <a:avLst/>
+          </a:prstGeom>
+          <a:solidFill>
+            <a:schemeClr val="tx1"/>
+          </a:solidFill>
+          <a:ln>
+            <a:solidFill>
+              <a:srgbClr val="50585B"/>
+            </a:solidFill>
+          </a:ln>
+        </p:spPr>
+        <p:style>
+          <a:lnRef idx="2">
+            <a:schemeClr val="accent1">
+              <a:shade val="15000"/>
+            </a:schemeClr>
+          </a:lnRef>
+          <a:fillRef idx="1">
+            <a:schemeClr val="accent1"/>
+          </a:fillRef>
+          <a:effectRef idx="0">
+            <a:schemeClr val="accent1"/>
+          </a:effectRef>
+          <a:fontRef idx="minor">
+            <a:schemeClr val="lt1"/>
+          </a:fontRef>
+        </p:style>
+        <p:txBody>
+          <a:bodyPr rtlCol="0" anchor="ctr"/>
+          <a:lstStyle/>
+          <a:p>
+            <a:pPr algn="ctr"/>
+            <a:r>
+              <a:rPr lang="en-US" sz="1200" dirty="0">
+                <a:solidFill>
+                  <a:schemeClr val="bg1"/>
+                </a:solidFill>
+              </a:rPr>
+              <a:t>Analog Discovery Board 3</a:t>
+            </a:r>
+          </a:p>
+        </p:txBody>
+      </p:sp>
+      <p:sp>
+        <p:nvSpPr>
+          <p:cNvPr id="16" name="Rectangle 15">
+            <a:extLst>
+              <a:ext uri="{FF2B5EF4-FFF2-40B4-BE49-F238E27FC236}">
+                <a16:creationId xmlns:a16="http://schemas.microsoft.com/office/drawing/2014/main" id="{F2B56313-4E54-1B13-12E6-88371B4598BB}"/>
+              </a:ext>
+            </a:extLst>
+          </p:cNvPr>
+          <p:cNvSpPr/>
+          <p:nvPr/>
+        </p:nvSpPr>
+        <p:spPr>
+          <a:xfrm>
+            <a:off x="3478901" y="2172331"/>
+            <a:ext cx="1906542" cy="243930"/>
+          </a:xfrm>
+          <a:prstGeom prst="rect">
+            <a:avLst/>
+          </a:prstGeom>
+          <a:solidFill>
+            <a:schemeClr val="bg1"/>
+          </a:solidFill>
+          <a:ln>
+            <a:solidFill>
+              <a:srgbClr val="008C48"/>
+            </a:solidFill>
+          </a:ln>
+        </p:spPr>
+        <p:style>
+          <a:lnRef idx="2">
+            <a:schemeClr val="accent1">
+              <a:shade val="15000"/>
+            </a:schemeClr>
+          </a:lnRef>
+          <a:fillRef idx="1">
+            <a:schemeClr val="accent1"/>
+          </a:fillRef>
+          <a:effectRef idx="0">
+            <a:schemeClr val="accent1"/>
+          </a:effectRef>
+          <a:fontRef idx="minor">
+            <a:schemeClr val="lt1"/>
+          </a:fontRef>
+        </p:style>
+        <p:txBody>
+          <a:bodyPr rtlCol="0" anchor="ctr"/>
+          <a:lstStyle/>
+          <a:p>
+            <a:pPr algn="ctr"/>
+            <a:r>
+              <a:rPr lang="en-US" sz="1200" dirty="0">
+                <a:solidFill>
+                  <a:srgbClr val="008C48"/>
+                </a:solidFill>
+              </a:rPr>
+              <a:t>NUCLEO-L476RG</a:t>
+            </a:r>
+          </a:p>
+        </p:txBody>
+      </p:sp>
+      <p:sp>
+        <p:nvSpPr>
+          <p:cNvPr id="18" name="Rectangle 17">
+            <a:extLst>
+              <a:ext uri="{FF2B5EF4-FFF2-40B4-BE49-F238E27FC236}">
+                <a16:creationId xmlns:a16="http://schemas.microsoft.com/office/drawing/2014/main" id="{82DD2461-30B8-7E30-9D50-53DA759E86C9}"/>
+              </a:ext>
+            </a:extLst>
+          </p:cNvPr>
+          <p:cNvSpPr/>
+          <p:nvPr/>
+        </p:nvSpPr>
+        <p:spPr>
+          <a:xfrm>
+            <a:off x="4150121" y="4627383"/>
+            <a:ext cx="1034271" cy="243930"/>
+          </a:xfrm>
+          <a:prstGeom prst="rect">
+            <a:avLst/>
+          </a:prstGeom>
+          <a:solidFill>
+            <a:srgbClr val="3E7F83"/>
+          </a:solidFill>
+        </p:spPr>
+        <p:style>
+          <a:lnRef idx="2">
+            <a:schemeClr val="accent1">
+              <a:shade val="15000"/>
+            </a:schemeClr>
+          </a:lnRef>
+          <a:fillRef idx="1">
+            <a:schemeClr val="accent1"/>
+          </a:fillRef>
+          <a:effectRef idx="0">
+            <a:schemeClr val="accent1"/>
+          </a:effectRef>
+          <a:fontRef idx="minor">
+            <a:schemeClr val="lt1"/>
+          </a:fontRef>
+        </p:style>
+        <p:txBody>
+          <a:bodyPr rtlCol="0" anchor="ctr"/>
+          <a:lstStyle/>
+          <a:p>
+            <a:r>
+              <a:rPr lang="en-US" sz="1200" dirty="0"/>
+              <a:t>A2: vf (out)</a:t>
+            </a:r>
+          </a:p>
+        </p:txBody>
+      </p:sp>
+      <p:sp>
+        <p:nvSpPr>
+          <p:cNvPr id="19" name="Rectangle 18">
+            <a:extLst>
+              <a:ext uri="{FF2B5EF4-FFF2-40B4-BE49-F238E27FC236}">
+                <a16:creationId xmlns:a16="http://schemas.microsoft.com/office/drawing/2014/main" id="{EA41503E-865C-D83F-1D16-FCA08387D9D2}"/>
+              </a:ext>
+            </a:extLst>
+          </p:cNvPr>
+          <p:cNvSpPr/>
+          <p:nvPr/>
+        </p:nvSpPr>
+        <p:spPr>
+          <a:xfrm>
+            <a:off x="3957345" y="5291579"/>
+            <a:ext cx="905783" cy="243930"/>
+          </a:xfrm>
+          <a:prstGeom prst="rect">
+            <a:avLst/>
+          </a:prstGeom>
+          <a:solidFill>
+            <a:srgbClr val="D5B65D"/>
+          </a:solidFill>
+        </p:spPr>
+        <p:style>
+          <a:lnRef idx="2">
+            <a:schemeClr val="accent1">
+              <a:shade val="15000"/>
+            </a:schemeClr>
+          </a:lnRef>
+          <a:fillRef idx="1">
+            <a:schemeClr val="accent1"/>
+          </a:fillRef>
+          <a:effectRef idx="0">
+            <a:schemeClr val="accent1"/>
+          </a:effectRef>
+          <a:fontRef idx="minor">
+            <a:schemeClr val="lt1"/>
+          </a:fontRef>
+        </p:style>
+        <p:txBody>
+          <a:bodyPr rtlCol="0" anchor="ctr"/>
+          <a:lstStyle/>
+          <a:p>
+            <a:r>
+              <a:rPr lang="en-US" sz="1200" dirty="0"/>
+              <a:t>A5: w (in)</a:t>
+            </a:r>
+          </a:p>
+        </p:txBody>
+      </p:sp>
+      <p:sp>
+        <p:nvSpPr>
+          <p:cNvPr id="20" name="Rectangle 19">
+            <a:extLst>
+              <a:ext uri="{FF2B5EF4-FFF2-40B4-BE49-F238E27FC236}">
+                <a16:creationId xmlns:a16="http://schemas.microsoft.com/office/drawing/2014/main" id="{9CEAEAAD-8E82-85A9-217E-BDAC910E6C40}"/>
+              </a:ext>
+            </a:extLst>
+          </p:cNvPr>
+          <p:cNvSpPr/>
+          <p:nvPr/>
+        </p:nvSpPr>
+        <p:spPr>
+          <a:xfrm>
+            <a:off x="8310368" y="4824035"/>
+            <a:ext cx="1044593" cy="243930"/>
+          </a:xfrm>
+          <a:prstGeom prst="rect">
+            <a:avLst/>
+          </a:prstGeom>
+          <a:solidFill>
+            <a:srgbClr val="BA592E"/>
+          </a:solidFill>
+        </p:spPr>
+        <p:style>
+          <a:lnRef idx="2">
+            <a:schemeClr val="accent1">
+              <a:shade val="15000"/>
+            </a:schemeClr>
+          </a:lnRef>
+          <a:fillRef idx="1">
+            <a:schemeClr val="accent1"/>
+          </a:fillRef>
+          <a:effectRef idx="0">
+            <a:schemeClr val="accent1"/>
+          </a:effectRef>
+          <a:fontRef idx="minor">
+            <a:schemeClr val="lt1"/>
+          </a:fontRef>
+        </p:style>
+        <p:txBody>
+          <a:bodyPr rtlCol="0" anchor="ctr"/>
+          <a:lstStyle/>
+          <a:p>
+            <a:r>
+              <a:rPr lang="en-US" sz="1200" dirty="0"/>
+              <a:t>D3: stepSize</a:t>
+            </a:r>
+          </a:p>
+        </p:txBody>
+      </p:sp>
+      <p:sp>
+        <p:nvSpPr>
+          <p:cNvPr id="21" name="Rectangle 20">
+            <a:extLst>
+              <a:ext uri="{FF2B5EF4-FFF2-40B4-BE49-F238E27FC236}">
+                <a16:creationId xmlns:a16="http://schemas.microsoft.com/office/drawing/2014/main" id="{2BD2AFA1-8706-7640-F00E-98DBF99B254E}"/>
+              </a:ext>
+            </a:extLst>
+          </p:cNvPr>
+          <p:cNvSpPr/>
+          <p:nvPr/>
+        </p:nvSpPr>
+        <p:spPr>
+          <a:xfrm>
+            <a:off x="8304190" y="5091078"/>
+            <a:ext cx="1050771" cy="243930"/>
+          </a:xfrm>
+          <a:prstGeom prst="rect">
+            <a:avLst/>
+          </a:prstGeom>
+          <a:solidFill>
+            <a:schemeClr val="bg2"/>
+          </a:solidFill>
+        </p:spPr>
+        <p:style>
+          <a:lnRef idx="2">
+            <a:schemeClr val="accent1">
+              <a:shade val="15000"/>
+            </a:schemeClr>
+          </a:lnRef>
+          <a:fillRef idx="1">
+            <a:schemeClr val="accent1"/>
+          </a:fillRef>
+          <a:effectRef idx="0">
+            <a:schemeClr val="accent1"/>
+          </a:effectRef>
+          <a:fontRef idx="minor">
+            <a:schemeClr val="lt1"/>
+          </a:fontRef>
+        </p:style>
+        <p:txBody>
+          <a:bodyPr rtlCol="0" anchor="ctr"/>
+          <a:lstStyle/>
+          <a:p>
+            <a:r>
+              <a:rPr lang="en-US" sz="1200" dirty="0">
+                <a:solidFill>
+                  <a:schemeClr val="tx1"/>
+                </a:solidFill>
+              </a:rPr>
+              <a:t>D2: calcTime</a:t>
+            </a:r>
+          </a:p>
+        </p:txBody>
+      </p:sp>
+      <p:sp>
+        <p:nvSpPr>
+          <p:cNvPr id="22" name="Rectangle 21">
+            <a:extLst>
+              <a:ext uri="{FF2B5EF4-FFF2-40B4-BE49-F238E27FC236}">
+                <a16:creationId xmlns:a16="http://schemas.microsoft.com/office/drawing/2014/main" id="{43BA55FE-ADD6-2C8E-8E35-525D0F9730D4}"/>
+              </a:ext>
+            </a:extLst>
+          </p:cNvPr>
+          <p:cNvSpPr/>
+          <p:nvPr/>
+        </p:nvSpPr>
+        <p:spPr>
+          <a:xfrm>
+            <a:off x="6603467" y="3723744"/>
+            <a:ext cx="487434" cy="208548"/>
+          </a:xfrm>
+          <a:prstGeom prst="rect">
+            <a:avLst/>
+          </a:prstGeom>
+          <a:solidFill>
+            <a:srgbClr val="275E9F"/>
+          </a:solidFill>
+        </p:spPr>
+        <p:style>
+          <a:lnRef idx="2">
+            <a:schemeClr val="accent1">
+              <a:shade val="15000"/>
+            </a:schemeClr>
+          </a:lnRef>
+          <a:fillRef idx="1">
+            <a:schemeClr val="accent1"/>
+          </a:fillRef>
+          <a:effectRef idx="0">
+            <a:schemeClr val="accent1"/>
+          </a:effectRef>
+          <a:fontRef idx="minor">
+            <a:schemeClr val="lt1"/>
+          </a:fontRef>
+        </p:style>
+        <p:txBody>
+          <a:bodyPr rtlCol="0" anchor="ctr"/>
+          <a:lstStyle/>
+          <a:p>
+            <a:pPr algn="ctr"/>
+            <a:r>
+              <a:rPr lang="en-US" sz="1200" dirty="0"/>
+              <a:t>W1</a:t>
+            </a:r>
+          </a:p>
+        </p:txBody>
+      </p:sp>
+      <p:cxnSp>
+        <p:nvCxnSpPr>
+          <p:cNvPr id="24" name="Straight Arrow Connector 23">
+            <a:extLst>
+              <a:ext uri="{FF2B5EF4-FFF2-40B4-BE49-F238E27FC236}">
+                <a16:creationId xmlns:a16="http://schemas.microsoft.com/office/drawing/2014/main" id="{01F9B569-E307-7750-839C-802AC6607E89}"/>
+              </a:ext>
+            </a:extLst>
+          </p:cNvPr>
+          <p:cNvCxnSpPr>
+            <a:cxnSpLocks/>
+          </p:cNvCxnSpPr>
+          <p:nvPr/>
+        </p:nvCxnSpPr>
+        <p:spPr>
+          <a:xfrm flipH="1">
+            <a:off x="6725223" y="1736914"/>
+            <a:ext cx="162345" cy="538252"/>
+          </a:xfrm>
+          <a:prstGeom prst="straightConnector1">
+            <a:avLst/>
+          </a:prstGeom>
+          <a:ln w="38100">
+            <a:solidFill>
+              <a:srgbClr val="D5B65D"/>
+            </a:solidFill>
+            <a:headEnd type="none" w="med" len="med"/>
+            <a:tailEnd type="arrow" w="med" len="med"/>
+          </a:ln>
+        </p:spPr>
+        <p:style>
+          <a:lnRef idx="2">
+            <a:schemeClr val="accent1"/>
+          </a:lnRef>
+          <a:fillRef idx="0">
+            <a:schemeClr val="accent1"/>
+          </a:fillRef>
+          <a:effectRef idx="1">
+            <a:schemeClr val="accent1"/>
+          </a:effectRef>
+          <a:fontRef idx="minor">
+            <a:schemeClr val="tx1"/>
+          </a:fontRef>
+        </p:style>
+      </p:cxnSp>
+      <p:sp>
+        <p:nvSpPr>
+          <p:cNvPr id="25" name="Rectangle 24">
+            <a:extLst>
+              <a:ext uri="{FF2B5EF4-FFF2-40B4-BE49-F238E27FC236}">
+                <a16:creationId xmlns:a16="http://schemas.microsoft.com/office/drawing/2014/main" id="{DAE9AC3D-81F0-6AB6-F638-E52D92DBCFB9}"/>
+              </a:ext>
+            </a:extLst>
+          </p:cNvPr>
+          <p:cNvSpPr/>
+          <p:nvPr/>
+        </p:nvSpPr>
+        <p:spPr>
+          <a:xfrm>
+            <a:off x="3992341" y="3627492"/>
+            <a:ext cx="417896" cy="192505"/>
+          </a:xfrm>
+          <a:prstGeom prst="rect">
+            <a:avLst/>
+          </a:prstGeom>
+          <a:solidFill>
+            <a:srgbClr val="1964AB"/>
+          </a:solidFill>
+        </p:spPr>
+        <p:style>
+          <a:lnRef idx="2">
+            <a:schemeClr val="accent1">
+              <a:shade val="15000"/>
+            </a:schemeClr>
+          </a:lnRef>
+          <a:fillRef idx="1">
+            <a:schemeClr val="accent1"/>
+          </a:fillRef>
+          <a:effectRef idx="0">
+            <a:schemeClr val="accent1"/>
+          </a:effectRef>
+          <a:fontRef idx="minor">
+            <a:schemeClr val="lt1"/>
+          </a:fontRef>
+        </p:style>
+        <p:txBody>
+          <a:bodyPr rtlCol="0" anchor="ctr"/>
+          <a:lstStyle/>
+          <a:p>
+            <a:pPr algn="ctr"/>
+            <a:r>
+              <a:rPr lang="en-US" sz="1200" dirty="0"/>
+              <a:t>B1</a:t>
+            </a:r>
+          </a:p>
+        </p:txBody>
+      </p:sp>
+      <p:sp>
+        <p:nvSpPr>
+          <p:cNvPr id="26" name="Rectangle 25">
+            <a:extLst>
+              <a:ext uri="{FF2B5EF4-FFF2-40B4-BE49-F238E27FC236}">
+                <a16:creationId xmlns:a16="http://schemas.microsoft.com/office/drawing/2014/main" id="{B859DB10-09A0-3830-79AA-4A1CC85DC1C7}"/>
+              </a:ext>
+            </a:extLst>
+          </p:cNvPr>
+          <p:cNvSpPr/>
+          <p:nvPr/>
+        </p:nvSpPr>
+        <p:spPr>
+          <a:xfrm>
+            <a:off x="5163181" y="3655397"/>
+            <a:ext cx="417896" cy="192505"/>
+          </a:xfrm>
+          <a:prstGeom prst="rect">
+            <a:avLst/>
+          </a:prstGeom>
+          <a:solidFill>
+            <a:schemeClr val="tx1"/>
+          </a:solidFill>
+        </p:spPr>
+        <p:style>
+          <a:lnRef idx="2">
+            <a:schemeClr val="accent1">
+              <a:shade val="15000"/>
+            </a:schemeClr>
+          </a:lnRef>
+          <a:fillRef idx="1">
+            <a:schemeClr val="accent1"/>
+          </a:fillRef>
+          <a:effectRef idx="0">
+            <a:schemeClr val="accent1"/>
+          </a:effectRef>
+          <a:fontRef idx="minor">
+            <a:schemeClr val="lt1"/>
+          </a:fontRef>
+        </p:style>
+        <p:txBody>
+          <a:bodyPr rtlCol="0" anchor="ctr"/>
+          <a:lstStyle/>
+          <a:p>
+            <a:pPr algn="ctr"/>
+            <a:r>
+              <a:rPr lang="en-US" sz="1200" dirty="0"/>
+              <a:t>B2</a:t>
+            </a:r>
+          </a:p>
+        </p:txBody>
+      </p:sp>
+      <p:sp>
+        <p:nvSpPr>
+          <p:cNvPr id="27" name="Rectangle 26">
+            <a:extLst>
+              <a:ext uri="{FF2B5EF4-FFF2-40B4-BE49-F238E27FC236}">
+                <a16:creationId xmlns:a16="http://schemas.microsoft.com/office/drawing/2014/main" id="{054B45CE-6FC9-E99D-16C2-295E534C355B}"/>
+              </a:ext>
+            </a:extLst>
+          </p:cNvPr>
+          <p:cNvSpPr/>
+          <p:nvPr/>
+        </p:nvSpPr>
+        <p:spPr>
+          <a:xfrm>
+            <a:off x="7813524" y="6021078"/>
+            <a:ext cx="417896" cy="192505"/>
+          </a:xfrm>
+          <a:prstGeom prst="rect">
+            <a:avLst/>
+          </a:prstGeom>
+          <a:solidFill>
+            <a:srgbClr val="1964AB"/>
+          </a:solidFill>
+        </p:spPr>
+        <p:style>
+          <a:lnRef idx="2">
+            <a:schemeClr val="accent1">
+              <a:shade val="15000"/>
+            </a:schemeClr>
+          </a:lnRef>
+          <a:fillRef idx="1">
+            <a:schemeClr val="accent1"/>
+          </a:fillRef>
+          <a:effectRef idx="0">
+            <a:schemeClr val="accent1"/>
+          </a:effectRef>
+          <a:fontRef idx="minor">
+            <a:schemeClr val="lt1"/>
+          </a:fontRef>
+        </p:style>
+        <p:txBody>
+          <a:bodyPr rtlCol="0" anchor="ctr"/>
+          <a:lstStyle/>
+          <a:p>
+            <a:pPr algn="ctr"/>
+            <a:r>
+              <a:rPr lang="en-US" sz="1200" dirty="0"/>
+              <a:t>B1</a:t>
+            </a:r>
+          </a:p>
+        </p:txBody>
+      </p:sp>
+      <p:sp>
+        <p:nvSpPr>
+          <p:cNvPr id="28" name="Rectangle 27">
+            <a:extLst>
+              <a:ext uri="{FF2B5EF4-FFF2-40B4-BE49-F238E27FC236}">
+                <a16:creationId xmlns:a16="http://schemas.microsoft.com/office/drawing/2014/main" id="{9434D4F6-01DC-BFF7-58E3-3E8B6708AD25}"/>
+              </a:ext>
+            </a:extLst>
+          </p:cNvPr>
+          <p:cNvSpPr/>
+          <p:nvPr/>
+        </p:nvSpPr>
+        <p:spPr>
+          <a:xfrm>
+            <a:off x="9402260" y="6021078"/>
+            <a:ext cx="417896" cy="192505"/>
+          </a:xfrm>
+          <a:prstGeom prst="rect">
+            <a:avLst/>
+          </a:prstGeom>
+          <a:solidFill>
+            <a:schemeClr val="tx1"/>
+          </a:solidFill>
+        </p:spPr>
+        <p:style>
+          <a:lnRef idx="2">
+            <a:schemeClr val="accent1">
+              <a:shade val="15000"/>
+            </a:schemeClr>
+          </a:lnRef>
+          <a:fillRef idx="1">
+            <a:schemeClr val="accent1"/>
+          </a:fillRef>
+          <a:effectRef idx="0">
+            <a:schemeClr val="accent1"/>
+          </a:effectRef>
+          <a:fontRef idx="minor">
+            <a:schemeClr val="lt1"/>
+          </a:fontRef>
+        </p:style>
+        <p:txBody>
+          <a:bodyPr rtlCol="0" anchor="ctr"/>
+          <a:lstStyle/>
+          <a:p>
+            <a:pPr algn="ctr"/>
+            <a:r>
+              <a:rPr lang="en-US" sz="1200" dirty="0"/>
+              <a:t>B2</a:t>
+            </a:r>
+          </a:p>
+        </p:txBody>
+      </p:sp>
+      <p:sp>
+        <p:nvSpPr>
+          <p:cNvPr id="29" name="Rectangle 28">
+            <a:extLst>
+              <a:ext uri="{FF2B5EF4-FFF2-40B4-BE49-F238E27FC236}">
+                <a16:creationId xmlns:a16="http://schemas.microsoft.com/office/drawing/2014/main" id="{BA5615E4-9E19-F69D-68B3-FB3A37A70357}"/>
+              </a:ext>
+            </a:extLst>
+          </p:cNvPr>
+          <p:cNvSpPr/>
+          <p:nvPr/>
+        </p:nvSpPr>
+        <p:spPr>
+          <a:xfrm>
+            <a:off x="3423275" y="2095963"/>
+            <a:ext cx="2650685" cy="3827041"/>
+          </a:xfrm>
+          <a:prstGeom prst="rect">
+            <a:avLst/>
+          </a:prstGeom>
+          <a:noFill/>
+          <a:ln w="38100">
+            <a:solidFill>
+              <a:srgbClr val="008C48"/>
+            </a:solidFill>
+            <a:prstDash val="dash"/>
+          </a:ln>
+        </p:spPr>
+        <p:style>
+          <a:lnRef idx="2">
+            <a:schemeClr val="accent1">
+              <a:shade val="15000"/>
+            </a:schemeClr>
+          </a:lnRef>
+          <a:fillRef idx="1">
+            <a:schemeClr val="accent1"/>
+          </a:fillRef>
+          <a:effectRef idx="0">
+            <a:schemeClr val="accent1"/>
+          </a:effectRef>
+          <a:fontRef idx="minor">
+            <a:schemeClr val="lt1"/>
+          </a:fontRef>
+        </p:style>
+        <p:txBody>
+          <a:bodyPr rtlCol="0" anchor="ctr"/>
+          <a:lstStyle/>
+          <a:p>
+            <a:pPr algn="ctr"/>
+            <a:endParaRPr lang="en-US" sz="1600"/>
+          </a:p>
+        </p:txBody>
+      </p:sp>
+      <p:sp>
+        <p:nvSpPr>
+          <p:cNvPr id="30" name="Rectangle 29">
+            <a:extLst>
+              <a:ext uri="{FF2B5EF4-FFF2-40B4-BE49-F238E27FC236}">
+                <a16:creationId xmlns:a16="http://schemas.microsoft.com/office/drawing/2014/main" id="{757F85CC-E748-56FD-83E5-F57568BC79D8}"/>
+              </a:ext>
+            </a:extLst>
+          </p:cNvPr>
+          <p:cNvSpPr/>
+          <p:nvPr/>
+        </p:nvSpPr>
+        <p:spPr>
+          <a:xfrm>
+            <a:off x="7948945" y="2172331"/>
+            <a:ext cx="1906542" cy="243930"/>
+          </a:xfrm>
+          <a:prstGeom prst="rect">
+            <a:avLst/>
+          </a:prstGeom>
+          <a:solidFill>
+            <a:schemeClr val="bg1"/>
+          </a:solidFill>
+          <a:ln>
+            <a:solidFill>
+              <a:srgbClr val="1C6CC8"/>
+            </a:solidFill>
+          </a:ln>
+        </p:spPr>
+        <p:style>
+          <a:lnRef idx="2">
+            <a:schemeClr val="accent1">
+              <a:shade val="15000"/>
+            </a:schemeClr>
+          </a:lnRef>
+          <a:fillRef idx="1">
+            <a:schemeClr val="accent1"/>
+          </a:fillRef>
+          <a:effectRef idx="0">
+            <a:schemeClr val="accent1"/>
+          </a:effectRef>
+          <a:fontRef idx="minor">
+            <a:schemeClr val="lt1"/>
+          </a:fontRef>
+        </p:style>
+        <p:txBody>
+          <a:bodyPr rtlCol="0" anchor="ctr"/>
+          <a:lstStyle/>
+          <a:p>
+            <a:pPr algn="ctr"/>
+            <a:r>
+              <a:rPr lang="en-US" sz="1200" dirty="0">
+                <a:solidFill>
+                  <a:srgbClr val="1C6CC8"/>
+                </a:solidFill>
+              </a:rPr>
+              <a:t>Nucleo-H723ZG</a:t>
+            </a:r>
+          </a:p>
+        </p:txBody>
+      </p:sp>
+      <p:sp>
+        <p:nvSpPr>
+          <p:cNvPr id="31" name="Rectangle 30">
+            <a:extLst>
+              <a:ext uri="{FF2B5EF4-FFF2-40B4-BE49-F238E27FC236}">
+                <a16:creationId xmlns:a16="http://schemas.microsoft.com/office/drawing/2014/main" id="{37007AAF-D4CD-B0E9-0881-C9FA65ACA06E}"/>
+              </a:ext>
+            </a:extLst>
+          </p:cNvPr>
+          <p:cNvSpPr/>
+          <p:nvPr/>
+        </p:nvSpPr>
+        <p:spPr>
+          <a:xfrm>
+            <a:off x="7741403" y="2095964"/>
+            <a:ext cx="2222922" cy="4659063"/>
+          </a:xfrm>
+          <a:prstGeom prst="rect">
+            <a:avLst/>
+          </a:prstGeom>
+          <a:noFill/>
+          <a:ln w="38100">
+            <a:solidFill>
+              <a:srgbClr val="1C6CC8"/>
+            </a:solidFill>
+            <a:prstDash val="dash"/>
+          </a:ln>
+        </p:spPr>
+        <p:style>
+          <a:lnRef idx="2">
+            <a:schemeClr val="accent1">
+              <a:shade val="15000"/>
+            </a:schemeClr>
+          </a:lnRef>
+          <a:fillRef idx="1">
+            <a:schemeClr val="accent1"/>
+          </a:fillRef>
+          <a:effectRef idx="0">
+            <a:schemeClr val="accent1"/>
+          </a:effectRef>
+          <a:fontRef idx="minor">
+            <a:schemeClr val="lt1"/>
+          </a:fontRef>
+        </p:style>
+        <p:txBody>
+          <a:bodyPr rtlCol="0" anchor="ctr"/>
+          <a:lstStyle/>
+          <a:p>
+            <a:pPr algn="ctr"/>
+            <a:endParaRPr lang="en-US" sz="1600"/>
+          </a:p>
+        </p:txBody>
+      </p:sp>
+      <p:cxnSp>
+        <p:nvCxnSpPr>
+          <p:cNvPr id="34" name="Straight Arrow Connector 33">
+            <a:extLst>
+              <a:ext uri="{FF2B5EF4-FFF2-40B4-BE49-F238E27FC236}">
+                <a16:creationId xmlns:a16="http://schemas.microsoft.com/office/drawing/2014/main" id="{BB5F8FEC-BD8A-A60D-1E81-67CD94CCF961}"/>
+              </a:ext>
+            </a:extLst>
+          </p:cNvPr>
+          <p:cNvCxnSpPr>
+            <a:cxnSpLocks/>
+          </p:cNvCxnSpPr>
+          <p:nvPr/>
+        </p:nvCxnSpPr>
+        <p:spPr>
+          <a:xfrm>
+            <a:off x="6397551" y="1952344"/>
+            <a:ext cx="91149" cy="356884"/>
+          </a:xfrm>
+          <a:prstGeom prst="straightConnector1">
+            <a:avLst/>
+          </a:prstGeom>
+          <a:ln w="38100">
+            <a:solidFill>
+              <a:srgbClr val="3E7F83"/>
+            </a:solidFill>
+            <a:headEnd type="none" w="med" len="med"/>
+            <a:tailEnd type="arrow" w="med" len="med"/>
+          </a:ln>
+        </p:spPr>
+        <p:style>
+          <a:lnRef idx="2">
+            <a:schemeClr val="accent1"/>
+          </a:lnRef>
+          <a:fillRef idx="0">
+            <a:schemeClr val="accent1"/>
+          </a:fillRef>
+          <a:effectRef idx="1">
+            <a:schemeClr val="accent1"/>
+          </a:effectRef>
+          <a:fontRef idx="minor">
+            <a:schemeClr val="tx1"/>
+          </a:fontRef>
+        </p:style>
+      </p:cxnSp>
+      <p:cxnSp>
+        <p:nvCxnSpPr>
+          <p:cNvPr id="38" name="Straight Arrow Connector 37">
+            <a:extLst>
+              <a:ext uri="{FF2B5EF4-FFF2-40B4-BE49-F238E27FC236}">
+                <a16:creationId xmlns:a16="http://schemas.microsoft.com/office/drawing/2014/main" id="{6A62B9F2-D735-06D8-C4BE-602BE585723D}"/>
+              </a:ext>
+            </a:extLst>
+          </p:cNvPr>
+          <p:cNvCxnSpPr>
+            <a:cxnSpLocks/>
+            <a:stCxn id="22" idx="0"/>
+          </p:cNvCxnSpPr>
+          <p:nvPr/>
+        </p:nvCxnSpPr>
+        <p:spPr>
+          <a:xfrm flipV="1">
+            <a:off x="6847184" y="3555985"/>
+            <a:ext cx="215331" cy="167759"/>
+          </a:xfrm>
+          <a:prstGeom prst="straightConnector1">
+            <a:avLst/>
+          </a:prstGeom>
+          <a:ln w="38100">
+            <a:solidFill>
+              <a:srgbClr val="275E9F"/>
+            </a:solidFill>
+            <a:headEnd type="none" w="med" len="med"/>
+            <a:tailEnd type="arrow" w="med" len="med"/>
+          </a:ln>
+        </p:spPr>
+        <p:style>
+          <a:lnRef idx="2">
+            <a:schemeClr val="accent1"/>
+          </a:lnRef>
+          <a:fillRef idx="0">
+            <a:schemeClr val="accent1"/>
+          </a:fillRef>
+          <a:effectRef idx="1">
+            <a:schemeClr val="accent1"/>
+          </a:effectRef>
+          <a:fontRef idx="minor">
+            <a:schemeClr val="tx1"/>
+          </a:fontRef>
+        </p:style>
+      </p:cxnSp>
+      <p:sp>
+        <p:nvSpPr>
+          <p:cNvPr id="46" name="Oval 45">
+            <a:extLst>
+              <a:ext uri="{FF2B5EF4-FFF2-40B4-BE49-F238E27FC236}">
+                <a16:creationId xmlns:a16="http://schemas.microsoft.com/office/drawing/2014/main" id="{AD4C6A7D-D1A5-79A4-2AD3-B962185AB6C9}"/>
+              </a:ext>
+            </a:extLst>
+          </p:cNvPr>
+          <p:cNvSpPr/>
+          <p:nvPr/>
+        </p:nvSpPr>
+        <p:spPr>
+          <a:xfrm>
+            <a:off x="3370389" y="5496856"/>
+            <a:ext cx="490017" cy="473320"/>
+          </a:xfrm>
+          <a:prstGeom prst="ellipse">
+            <a:avLst/>
+          </a:prstGeom>
+          <a:solidFill>
+            <a:srgbClr val="008C48"/>
+          </a:solidFill>
+          <a:ln>
+            <a:solidFill>
+              <a:srgbClr val="217D52"/>
+            </a:solidFill>
+          </a:ln>
+        </p:spPr>
+        <p:style>
+          <a:lnRef idx="2">
+            <a:schemeClr val="dk1">
+              <a:shade val="15000"/>
+            </a:schemeClr>
+          </a:lnRef>
+          <a:fillRef idx="1">
+            <a:schemeClr val="dk1"/>
+          </a:fillRef>
+          <a:effectRef idx="0">
+            <a:schemeClr val="dk1"/>
+          </a:effectRef>
+          <a:fontRef idx="minor">
+            <a:schemeClr val="lt1"/>
+          </a:fontRef>
+        </p:style>
+        <p:txBody>
+          <a:bodyPr rtlCol="0" anchor="ctr"/>
+          <a:lstStyle/>
+          <a:p>
+            <a:pPr algn="ctr"/>
+            <a:r>
+              <a:rPr lang="en-US" sz="1600" dirty="0"/>
+              <a:t>C</a:t>
+            </a:r>
+          </a:p>
+        </p:txBody>
+      </p:sp>
+      <p:sp>
+        <p:nvSpPr>
+          <p:cNvPr id="47" name="Oval 46">
+            <a:extLst>
+              <a:ext uri="{FF2B5EF4-FFF2-40B4-BE49-F238E27FC236}">
+                <a16:creationId xmlns:a16="http://schemas.microsoft.com/office/drawing/2014/main" id="{4EB51CE4-AB98-E71C-595E-8D5EE1C4CD61}"/>
+              </a:ext>
+            </a:extLst>
+          </p:cNvPr>
+          <p:cNvSpPr/>
+          <p:nvPr/>
+        </p:nvSpPr>
+        <p:spPr>
+          <a:xfrm>
+            <a:off x="9490718" y="1648519"/>
+            <a:ext cx="490017" cy="473320"/>
+          </a:xfrm>
+          <a:prstGeom prst="ellipse">
+            <a:avLst/>
+          </a:prstGeom>
+          <a:solidFill>
+            <a:srgbClr val="275E9F"/>
+          </a:solidFill>
+          <a:ln>
+            <a:solidFill>
+              <a:srgbClr val="0070C0"/>
+            </a:solidFill>
+          </a:ln>
+        </p:spPr>
+        <p:style>
+          <a:lnRef idx="2">
+            <a:schemeClr val="dk1">
+              <a:shade val="15000"/>
+            </a:schemeClr>
+          </a:lnRef>
+          <a:fillRef idx="1">
+            <a:schemeClr val="dk1"/>
+          </a:fillRef>
+          <a:effectRef idx="0">
+            <a:schemeClr val="dk1"/>
+          </a:effectRef>
+          <a:fontRef idx="minor">
+            <a:schemeClr val="lt1"/>
+          </a:fontRef>
+        </p:style>
+        <p:txBody>
+          <a:bodyPr rtlCol="0" anchor="ctr"/>
+          <a:lstStyle/>
+          <a:p>
+            <a:pPr algn="ctr"/>
+            <a:r>
+              <a:rPr lang="en-US" sz="1600" dirty="0"/>
+              <a:t>P</a:t>
+            </a:r>
+          </a:p>
+        </p:txBody>
+      </p:sp>
+      <p:sp>
+        <p:nvSpPr>
+          <p:cNvPr id="48" name="Oval 47">
+            <a:extLst>
+              <a:ext uri="{FF2B5EF4-FFF2-40B4-BE49-F238E27FC236}">
+                <a16:creationId xmlns:a16="http://schemas.microsoft.com/office/drawing/2014/main" id="{9FB132B3-2CA8-10BF-105C-750AC59B7B13}"/>
+              </a:ext>
+            </a:extLst>
+          </p:cNvPr>
+          <p:cNvSpPr/>
+          <p:nvPr/>
+        </p:nvSpPr>
+        <p:spPr>
+          <a:xfrm>
+            <a:off x="5850991" y="128465"/>
+            <a:ext cx="490017" cy="473320"/>
+          </a:xfrm>
+          <a:prstGeom prst="ellipse">
+            <a:avLst/>
+          </a:prstGeom>
+          <a:ln>
+            <a:solidFill>
+              <a:schemeClr val="bg2"/>
+            </a:solidFill>
+          </a:ln>
+        </p:spPr>
+        <p:style>
+          <a:lnRef idx="2">
+            <a:schemeClr val="dk1">
+              <a:shade val="15000"/>
+            </a:schemeClr>
+          </a:lnRef>
+          <a:fillRef idx="1">
+            <a:schemeClr val="dk1"/>
+          </a:fillRef>
+          <a:effectRef idx="0">
+            <a:schemeClr val="dk1"/>
+          </a:effectRef>
+          <a:fontRef idx="minor">
+            <a:schemeClr val="lt1"/>
+          </a:fontRef>
+        </p:style>
+        <p:txBody>
+          <a:bodyPr rtlCol="0" anchor="ctr"/>
+          <a:lstStyle/>
+          <a:p>
+            <a:pPr algn="ctr"/>
+            <a:r>
+              <a:rPr lang="en-US" sz="1600" dirty="0"/>
+              <a:t>M</a:t>
+            </a:r>
+          </a:p>
+        </p:txBody>
+      </p:sp>
+      <p:sp>
+        <p:nvSpPr>
+          <p:cNvPr id="3" name="Rectangle 2">
+            <a:extLst>
+              <a:ext uri="{FF2B5EF4-FFF2-40B4-BE49-F238E27FC236}">
+                <a16:creationId xmlns:a16="http://schemas.microsoft.com/office/drawing/2014/main" id="{227F8A36-233E-646F-7C7D-810613E6B31B}"/>
+              </a:ext>
+            </a:extLst>
+          </p:cNvPr>
+          <p:cNvSpPr/>
+          <p:nvPr/>
+        </p:nvSpPr>
+        <p:spPr>
+          <a:xfrm>
+            <a:off x="8653849" y="3136199"/>
+            <a:ext cx="444844" cy="367930"/>
+          </a:xfrm>
+          <a:prstGeom prst="rect">
+            <a:avLst/>
+          </a:prstGeom>
+          <a:noFill/>
+          <a:ln w="38100">
+            <a:solidFill>
+              <a:schemeClr val="accent5"/>
+            </a:solidFill>
+            <a:prstDash val="sysDash"/>
+          </a:ln>
+        </p:spPr>
+        <p:style>
+          <a:lnRef idx="2">
+            <a:schemeClr val="accent1">
+              <a:shade val="15000"/>
+            </a:schemeClr>
+          </a:lnRef>
+          <a:fillRef idx="1">
+            <a:schemeClr val="accent1"/>
+          </a:fillRef>
+          <a:effectRef idx="0">
+            <a:schemeClr val="accent1"/>
+          </a:effectRef>
+          <a:fontRef idx="minor">
+            <a:schemeClr val="lt1"/>
+          </a:fontRef>
+        </p:style>
+        <p:txBody>
+          <a:bodyPr rtlCol="0" anchor="ctr"/>
+          <a:lstStyle/>
+          <a:p>
+            <a:pPr algn="ctr"/>
+            <a:endParaRPr lang="en-US" sz="1600"/>
+          </a:p>
+        </p:txBody>
+      </p:sp>
+      <p:sp>
+        <p:nvSpPr>
+          <p:cNvPr id="4" name="Rectangle 3">
+            <a:extLst>
+              <a:ext uri="{FF2B5EF4-FFF2-40B4-BE49-F238E27FC236}">
+                <a16:creationId xmlns:a16="http://schemas.microsoft.com/office/drawing/2014/main" id="{6D1F1C37-CB63-3816-05FC-913A96D6759F}"/>
+              </a:ext>
+            </a:extLst>
+          </p:cNvPr>
+          <p:cNvSpPr/>
+          <p:nvPr/>
+        </p:nvSpPr>
+        <p:spPr>
+          <a:xfrm>
+            <a:off x="4704208" y="4931850"/>
+            <a:ext cx="1146031" cy="243930"/>
+          </a:xfrm>
+          <a:prstGeom prst="rect">
+            <a:avLst/>
+          </a:prstGeom>
+          <a:solidFill>
+            <a:srgbClr val="BA592E"/>
+          </a:solidFill>
+        </p:spPr>
+        <p:style>
+          <a:lnRef idx="2">
+            <a:schemeClr val="accent1">
+              <a:shade val="15000"/>
+            </a:schemeClr>
+          </a:lnRef>
+          <a:fillRef idx="1">
+            <a:schemeClr val="accent1"/>
+          </a:fillRef>
+          <a:effectRef idx="0">
+            <a:schemeClr val="accent1"/>
+          </a:effectRef>
+          <a:fontRef idx="minor">
+            <a:schemeClr val="lt1"/>
+          </a:fontRef>
+        </p:style>
+        <p:txBody>
+          <a:bodyPr rtlCol="0" anchor="ctr"/>
+          <a:lstStyle/>
+          <a:p>
+            <a:r>
+              <a:rPr lang="en-US" sz="1200" dirty="0"/>
+              <a:t>D11: stepSize</a:t>
+            </a:r>
+          </a:p>
+        </p:txBody>
+      </p:sp>
+      <p:sp>
+        <p:nvSpPr>
+          <p:cNvPr id="7" name="Rectangle 6">
+            <a:extLst>
+              <a:ext uri="{FF2B5EF4-FFF2-40B4-BE49-F238E27FC236}">
+                <a16:creationId xmlns:a16="http://schemas.microsoft.com/office/drawing/2014/main" id="{7C1AF879-88D9-B46C-1872-6E75481BF877}"/>
+              </a:ext>
+            </a:extLst>
+          </p:cNvPr>
+          <p:cNvSpPr/>
+          <p:nvPr/>
+        </p:nvSpPr>
+        <p:spPr>
+          <a:xfrm>
+            <a:off x="4081857" y="4173320"/>
+            <a:ext cx="1146032" cy="243930"/>
+          </a:xfrm>
+          <a:prstGeom prst="rect">
+            <a:avLst/>
+          </a:prstGeom>
+          <a:solidFill>
+            <a:schemeClr val="bg2"/>
+          </a:solidFill>
+        </p:spPr>
+        <p:style>
+          <a:lnRef idx="2">
+            <a:schemeClr val="accent1">
+              <a:shade val="15000"/>
+            </a:schemeClr>
+          </a:lnRef>
+          <a:fillRef idx="1">
+            <a:schemeClr val="accent1"/>
+          </a:fillRef>
+          <a:effectRef idx="0">
+            <a:schemeClr val="accent1"/>
+          </a:effectRef>
+          <a:fontRef idx="minor">
+            <a:schemeClr val="lt1"/>
+          </a:fontRef>
+        </p:style>
+        <p:txBody>
+          <a:bodyPr rtlCol="0" anchor="ctr"/>
+          <a:lstStyle/>
+          <a:p>
+            <a:r>
+              <a:rPr lang="en-US" sz="1200" dirty="0">
+                <a:solidFill>
+                  <a:schemeClr val="tx1"/>
+                </a:solidFill>
+              </a:rPr>
+              <a:t>D12: calcTime</a:t>
+            </a:r>
+          </a:p>
+        </p:txBody>
+      </p:sp>
+      <p:cxnSp>
+        <p:nvCxnSpPr>
+          <p:cNvPr id="40" name="Straight Arrow Connector 39">
+            <a:extLst>
+              <a:ext uri="{FF2B5EF4-FFF2-40B4-BE49-F238E27FC236}">
+                <a16:creationId xmlns:a16="http://schemas.microsoft.com/office/drawing/2014/main" id="{FB550A54-7533-146C-6BC9-2B909C609354}"/>
+              </a:ext>
+            </a:extLst>
+          </p:cNvPr>
+          <p:cNvCxnSpPr>
+            <a:cxnSpLocks/>
+            <a:stCxn id="18" idx="1"/>
+          </p:cNvCxnSpPr>
+          <p:nvPr/>
+        </p:nvCxnSpPr>
+        <p:spPr>
+          <a:xfrm flipH="1">
+            <a:off x="3962321" y="4749348"/>
+            <a:ext cx="187800" cy="246473"/>
+          </a:xfrm>
+          <a:prstGeom prst="straightConnector1">
+            <a:avLst/>
+          </a:prstGeom>
+          <a:ln w="38100">
+            <a:solidFill>
+              <a:srgbClr val="3E7F83"/>
+            </a:solidFill>
+            <a:headEnd type="none" w="med" len="med"/>
+            <a:tailEnd type="arrow" w="med" len="med"/>
+          </a:ln>
+        </p:spPr>
+        <p:style>
+          <a:lnRef idx="2">
+            <a:schemeClr val="accent1"/>
+          </a:lnRef>
+          <a:fillRef idx="0">
+            <a:schemeClr val="accent1"/>
+          </a:fillRef>
+          <a:effectRef idx="1">
+            <a:schemeClr val="accent1"/>
+          </a:effectRef>
+          <a:fontRef idx="minor">
+            <a:schemeClr val="tx1"/>
+          </a:fontRef>
+        </p:style>
+      </p:cxnSp>
+      <p:cxnSp>
+        <p:nvCxnSpPr>
+          <p:cNvPr id="42" name="Straight Arrow Connector 41">
+            <a:extLst>
+              <a:ext uri="{FF2B5EF4-FFF2-40B4-BE49-F238E27FC236}">
+                <a16:creationId xmlns:a16="http://schemas.microsoft.com/office/drawing/2014/main" id="{EDA6E68A-F0C5-BE0B-BEF4-83355E0472E9}"/>
+              </a:ext>
+            </a:extLst>
+          </p:cNvPr>
+          <p:cNvCxnSpPr>
+            <a:cxnSpLocks/>
+            <a:stCxn id="13" idx="1"/>
+          </p:cNvCxnSpPr>
+          <p:nvPr/>
+        </p:nvCxnSpPr>
+        <p:spPr>
+          <a:xfrm flipH="1">
+            <a:off x="8140320" y="4259351"/>
+            <a:ext cx="292737" cy="166144"/>
+          </a:xfrm>
+          <a:prstGeom prst="straightConnector1">
+            <a:avLst/>
+          </a:prstGeom>
+          <a:ln w="38100">
+            <a:solidFill>
+              <a:srgbClr val="3E7F83"/>
+            </a:solidFill>
+            <a:headEnd type="none" w="med" len="med"/>
+            <a:tailEnd type="arrow" w="med" len="med"/>
+          </a:ln>
+        </p:spPr>
+        <p:style>
+          <a:lnRef idx="2">
+            <a:schemeClr val="accent1"/>
+          </a:lnRef>
+          <a:fillRef idx="0">
+            <a:schemeClr val="accent1"/>
+          </a:fillRef>
+          <a:effectRef idx="1">
+            <a:schemeClr val="accent1"/>
+          </a:effectRef>
+          <a:fontRef idx="minor">
+            <a:schemeClr val="tx1"/>
+          </a:fontRef>
+        </p:style>
+      </p:cxnSp>
+      <p:sp>
+        <p:nvSpPr>
+          <p:cNvPr id="44" name="Rectangle 43">
+            <a:extLst>
+              <a:ext uri="{FF2B5EF4-FFF2-40B4-BE49-F238E27FC236}">
+                <a16:creationId xmlns:a16="http://schemas.microsoft.com/office/drawing/2014/main" id="{92E4986E-907B-99E2-B0AC-40A934DAB5E2}"/>
+              </a:ext>
+            </a:extLst>
+          </p:cNvPr>
+          <p:cNvSpPr/>
+          <p:nvPr/>
+        </p:nvSpPr>
+        <p:spPr>
+          <a:xfrm>
+            <a:off x="8286688" y="2856993"/>
+            <a:ext cx="1162438" cy="243930"/>
+          </a:xfrm>
+          <a:prstGeom prst="rect">
+            <a:avLst/>
+          </a:prstGeom>
+          <a:solidFill>
+            <a:srgbClr val="A02B93"/>
+          </a:solidFill>
+        </p:spPr>
+        <p:style>
+          <a:lnRef idx="2">
+            <a:schemeClr val="accent1">
+              <a:shade val="15000"/>
+            </a:schemeClr>
+          </a:lnRef>
+          <a:fillRef idx="1">
+            <a:schemeClr val="accent1"/>
+          </a:fillRef>
+          <a:effectRef idx="0">
+            <a:schemeClr val="accent1"/>
+          </a:effectRef>
+          <a:fontRef idx="minor">
+            <a:schemeClr val="lt1"/>
+          </a:fontRef>
+        </p:style>
+        <p:txBody>
+          <a:bodyPr rtlCol="0" anchor="ctr"/>
+          <a:lstStyle/>
+          <a:p>
+            <a:r>
+              <a:rPr lang="en-US" sz="1200" dirty="0"/>
+              <a:t>LD1, LD2, LD3</a:t>
+            </a:r>
+          </a:p>
+        </p:txBody>
+      </p:sp>
+      <p:cxnSp>
+        <p:nvCxnSpPr>
+          <p:cNvPr id="45" name="Straight Arrow Connector 44">
+            <a:extLst>
+              <a:ext uri="{FF2B5EF4-FFF2-40B4-BE49-F238E27FC236}">
+                <a16:creationId xmlns:a16="http://schemas.microsoft.com/office/drawing/2014/main" id="{76DE7D78-BA3A-D25B-4FBF-9CF9DAB99234}"/>
+              </a:ext>
+            </a:extLst>
+          </p:cNvPr>
+          <p:cNvCxnSpPr>
+            <a:cxnSpLocks/>
+            <a:stCxn id="10" idx="0"/>
+          </p:cNvCxnSpPr>
+          <p:nvPr/>
+        </p:nvCxnSpPr>
+        <p:spPr>
+          <a:xfrm flipV="1">
+            <a:off x="9531509" y="3819997"/>
+            <a:ext cx="131475" cy="283065"/>
+          </a:xfrm>
+          <a:prstGeom prst="straightConnector1">
+            <a:avLst/>
+          </a:prstGeom>
+          <a:ln w="38100">
+            <a:solidFill>
+              <a:srgbClr val="D5B65D"/>
+            </a:solidFill>
+            <a:headEnd type="none" w="med" len="med"/>
+            <a:tailEnd type="arrow" w="med" len="med"/>
+          </a:ln>
+        </p:spPr>
+        <p:style>
+          <a:lnRef idx="2">
+            <a:schemeClr val="accent1"/>
+          </a:lnRef>
+          <a:fillRef idx="0">
+            <a:schemeClr val="accent1"/>
+          </a:fillRef>
+          <a:effectRef idx="1">
+            <a:schemeClr val="accent1"/>
+          </a:effectRef>
+          <a:fontRef idx="minor">
+            <a:schemeClr val="tx1"/>
+          </a:fontRef>
+        </p:style>
+      </p:cxnSp>
+      <p:cxnSp>
+        <p:nvCxnSpPr>
+          <p:cNvPr id="53" name="Straight Arrow Connector 52">
+            <a:extLst>
+              <a:ext uri="{FF2B5EF4-FFF2-40B4-BE49-F238E27FC236}">
+                <a16:creationId xmlns:a16="http://schemas.microsoft.com/office/drawing/2014/main" id="{C0929807-0433-6D1A-32A0-6988B4912A48}"/>
+              </a:ext>
+            </a:extLst>
+          </p:cNvPr>
+          <p:cNvCxnSpPr>
+            <a:cxnSpLocks/>
+          </p:cNvCxnSpPr>
+          <p:nvPr/>
+        </p:nvCxnSpPr>
+        <p:spPr>
+          <a:xfrm flipH="1">
+            <a:off x="6877623" y="1889314"/>
+            <a:ext cx="162345" cy="538252"/>
+          </a:xfrm>
+          <a:prstGeom prst="straightConnector1">
+            <a:avLst/>
+          </a:prstGeom>
+          <a:ln w="38100">
+            <a:solidFill>
+              <a:srgbClr val="D5B65D"/>
+            </a:solidFill>
+            <a:headEnd type="none" w="med" len="med"/>
+            <a:tailEnd type="arrow" w="med" len="med"/>
+          </a:ln>
+        </p:spPr>
+        <p:style>
+          <a:lnRef idx="2">
+            <a:schemeClr val="accent1"/>
+          </a:lnRef>
+          <a:fillRef idx="0">
+            <a:schemeClr val="accent1"/>
+          </a:fillRef>
+          <a:effectRef idx="1">
+            <a:schemeClr val="accent1"/>
+          </a:effectRef>
+          <a:fontRef idx="minor">
+            <a:schemeClr val="tx1"/>
+          </a:fontRef>
+        </p:style>
+      </p:cxnSp>
+      <p:cxnSp>
+        <p:nvCxnSpPr>
+          <p:cNvPr id="54" name="Straight Arrow Connector 53">
+            <a:extLst>
+              <a:ext uri="{FF2B5EF4-FFF2-40B4-BE49-F238E27FC236}">
+                <a16:creationId xmlns:a16="http://schemas.microsoft.com/office/drawing/2014/main" id="{390675F1-C8DC-ECEC-97A6-BCB99F11D14C}"/>
+              </a:ext>
+            </a:extLst>
+          </p:cNvPr>
+          <p:cNvCxnSpPr>
+            <a:cxnSpLocks/>
+            <a:stCxn id="4" idx="0"/>
+          </p:cNvCxnSpPr>
+          <p:nvPr/>
+        </p:nvCxnSpPr>
+        <p:spPr>
+          <a:xfrm flipV="1">
+            <a:off x="5277224" y="4477932"/>
+            <a:ext cx="196740" cy="453918"/>
+          </a:xfrm>
+          <a:prstGeom prst="straightConnector1">
+            <a:avLst/>
+          </a:prstGeom>
+          <a:ln w="38100">
+            <a:solidFill>
+              <a:srgbClr val="CE6D30"/>
+            </a:solidFill>
+            <a:headEnd type="none" w="med" len="med"/>
+            <a:tailEnd type="arrow" w="med" len="med"/>
+          </a:ln>
+        </p:spPr>
+        <p:style>
+          <a:lnRef idx="2">
+            <a:schemeClr val="accent1"/>
+          </a:lnRef>
+          <a:fillRef idx="0">
+            <a:schemeClr val="accent1"/>
+          </a:fillRef>
+          <a:effectRef idx="1">
+            <a:schemeClr val="accent1"/>
+          </a:effectRef>
+          <a:fontRef idx="minor">
+            <a:schemeClr val="tx1"/>
+          </a:fontRef>
+        </p:style>
+      </p:cxnSp>
+      <p:cxnSp>
+        <p:nvCxnSpPr>
+          <p:cNvPr id="57" name="Straight Arrow Connector 56">
+            <a:extLst>
+              <a:ext uri="{FF2B5EF4-FFF2-40B4-BE49-F238E27FC236}">
+                <a16:creationId xmlns:a16="http://schemas.microsoft.com/office/drawing/2014/main" id="{E04545B1-2AD8-EAC6-45F2-B61C3BD51583}"/>
+              </a:ext>
+            </a:extLst>
+          </p:cNvPr>
+          <p:cNvCxnSpPr>
+            <a:cxnSpLocks/>
+          </p:cNvCxnSpPr>
+          <p:nvPr/>
+        </p:nvCxnSpPr>
+        <p:spPr>
+          <a:xfrm>
+            <a:off x="5227889" y="4281936"/>
+            <a:ext cx="208447" cy="19884"/>
+          </a:xfrm>
+          <a:prstGeom prst="straightConnector1">
+            <a:avLst/>
+          </a:prstGeom>
+          <a:ln w="38100">
+            <a:solidFill>
+              <a:srgbClr val="E8E8E8"/>
+            </a:solidFill>
+            <a:headEnd type="none" w="med" len="med"/>
+            <a:tailEnd type="arrow" w="med" len="med"/>
+          </a:ln>
+        </p:spPr>
+        <p:style>
+          <a:lnRef idx="2">
+            <a:schemeClr val="accent1"/>
+          </a:lnRef>
+          <a:fillRef idx="0">
+            <a:schemeClr val="accent1"/>
+          </a:fillRef>
+          <a:effectRef idx="1">
+            <a:schemeClr val="accent1"/>
+          </a:effectRef>
+          <a:fontRef idx="minor">
+            <a:schemeClr val="tx1"/>
+          </a:fontRef>
+        </p:style>
+      </p:cxnSp>
+      <p:cxnSp>
+        <p:nvCxnSpPr>
+          <p:cNvPr id="59" name="Straight Arrow Connector 58">
+            <a:extLst>
+              <a:ext uri="{FF2B5EF4-FFF2-40B4-BE49-F238E27FC236}">
+                <a16:creationId xmlns:a16="http://schemas.microsoft.com/office/drawing/2014/main" id="{3B0F7EB2-2633-BACA-94D8-E572B804E46D}"/>
+              </a:ext>
+            </a:extLst>
+          </p:cNvPr>
+          <p:cNvCxnSpPr>
+            <a:cxnSpLocks/>
+            <a:stCxn id="20" idx="3"/>
+          </p:cNvCxnSpPr>
+          <p:nvPr/>
+        </p:nvCxnSpPr>
+        <p:spPr>
+          <a:xfrm flipV="1">
+            <a:off x="9354961" y="4644069"/>
+            <a:ext cx="347055" cy="301931"/>
+          </a:xfrm>
+          <a:prstGeom prst="straightConnector1">
+            <a:avLst/>
+          </a:prstGeom>
+          <a:ln w="38100">
+            <a:solidFill>
+              <a:srgbClr val="CE6D30"/>
+            </a:solidFill>
+            <a:headEnd type="none" w="med" len="med"/>
+            <a:tailEnd type="arrow" w="med" len="med"/>
+          </a:ln>
+        </p:spPr>
+        <p:style>
+          <a:lnRef idx="2">
+            <a:schemeClr val="accent1"/>
+          </a:lnRef>
+          <a:fillRef idx="0">
+            <a:schemeClr val="accent1"/>
+          </a:fillRef>
+          <a:effectRef idx="1">
+            <a:schemeClr val="accent1"/>
+          </a:effectRef>
+          <a:fontRef idx="minor">
+            <a:schemeClr val="tx1"/>
+          </a:fontRef>
+        </p:style>
+      </p:cxnSp>
+      <p:cxnSp>
+        <p:nvCxnSpPr>
+          <p:cNvPr id="62" name="Straight Arrow Connector 61">
+            <a:extLst>
+              <a:ext uri="{FF2B5EF4-FFF2-40B4-BE49-F238E27FC236}">
+                <a16:creationId xmlns:a16="http://schemas.microsoft.com/office/drawing/2014/main" id="{400C1293-FA04-FFA3-0B8A-801BFDF7BFCF}"/>
+              </a:ext>
+            </a:extLst>
+          </p:cNvPr>
+          <p:cNvCxnSpPr>
+            <a:cxnSpLocks/>
+            <a:stCxn id="21" idx="3"/>
+          </p:cNvCxnSpPr>
+          <p:nvPr/>
+        </p:nvCxnSpPr>
+        <p:spPr>
+          <a:xfrm flipV="1">
+            <a:off x="9354961" y="4787724"/>
+            <a:ext cx="380765" cy="425319"/>
+          </a:xfrm>
+          <a:prstGeom prst="straightConnector1">
+            <a:avLst/>
+          </a:prstGeom>
+          <a:ln w="38100">
+            <a:solidFill>
+              <a:srgbClr val="E8E8E8"/>
+            </a:solidFill>
+            <a:headEnd type="none" w="med" len="med"/>
+            <a:tailEnd type="arrow" w="med" len="med"/>
+          </a:ln>
+        </p:spPr>
+        <p:style>
+          <a:lnRef idx="2">
+            <a:schemeClr val="accent1"/>
+          </a:lnRef>
+          <a:fillRef idx="0">
+            <a:schemeClr val="accent1"/>
+          </a:fillRef>
+          <a:effectRef idx="1">
+            <a:schemeClr val="accent1"/>
+          </a:effectRef>
+          <a:fontRef idx="minor">
+            <a:schemeClr val="tx1"/>
+          </a:fontRef>
+        </p:style>
+      </p:cxnSp>
+    </p:spTree>
+    <p:extLst>
+      <p:ext uri="{BB962C8B-B14F-4D97-AF65-F5344CB8AC3E}">
+        <p14:creationId xmlns:p14="http://schemas.microsoft.com/office/powerpoint/2010/main" val="2188520191"/>
       </p:ext>
     </p:extLst>
   </p:cSld>
@@ -5235,4 +7908,319 @@
     </a:ext>
   </a:extLst>
 </a:theme>
+</file>
+
+<file path=ppt/theme/theme2.xml><?xml version="1.0" encoding="utf-8"?>
+<a:theme xmlns:a="http://schemas.openxmlformats.org/drawingml/2006/main" name="Office Theme">
+  <a:themeElements>
+    <a:clrScheme name="Office">
+      <a:dk1>
+        <a:sysClr val="windowText" lastClr="000000"/>
+      </a:dk1>
+      <a:lt1>
+        <a:sysClr val="window" lastClr="FFFFFF"/>
+      </a:lt1>
+      <a:dk2>
+        <a:srgbClr val="0E2841"/>
+      </a:dk2>
+      <a:lt2>
+        <a:srgbClr val="E8E8E8"/>
+      </a:lt2>
+      <a:accent1>
+        <a:srgbClr val="156082"/>
+      </a:accent1>
+      <a:accent2>
+        <a:srgbClr val="E97132"/>
+      </a:accent2>
+      <a:accent3>
+        <a:srgbClr val="196B24"/>
+      </a:accent3>
+      <a:accent4>
+        <a:srgbClr val="0F9ED5"/>
+      </a:accent4>
+      <a:accent5>
+        <a:srgbClr val="A02B93"/>
+      </a:accent5>
+      <a:accent6>
+        <a:srgbClr val="4EA72E"/>
+      </a:accent6>
+      <a:hlink>
+        <a:srgbClr val="467886"/>
+      </a:hlink>
+      <a:folHlink>
+        <a:srgbClr val="96607D"/>
+      </a:folHlink>
+    </a:clrScheme>
+    <a:fontScheme name="Office">
+      <a:majorFont>
+        <a:latin typeface="Aptos Display" panose="02110004020202020204"/>
+        <a:ea typeface=""/>
+        <a:cs typeface=""/>
+        <a:font script="Jpan" typeface="游ゴシック Light"/>
+        <a:font script="Hang" typeface="맑은 고딕"/>
+        <a:font script="Hans" typeface="等线 Light"/>
+        <a:font script="Hant" typeface="新細明體"/>
+        <a:font script="Arab" typeface="Times New Roman"/>
+        <a:font script="Hebr" typeface="Times New Roman"/>
+        <a:font script="Thai" typeface="Angsana New"/>
+        <a:font script="Ethi" typeface="Nyala"/>
+        <a:font script="Beng" typeface="Vrinda"/>
+        <a:font script="Gujr" typeface="Shruti"/>
+        <a:font script="Khmr" typeface="MoolBoran"/>
+        <a:font script="Knda" typeface="Tunga"/>
+        <a:font script="Guru" typeface="Raavi"/>
+        <a:font script="Cans" typeface="Euphemia"/>
+        <a:font script="Cher" typeface="Plantagenet Cherokee"/>
+        <a:font script="Yiii" typeface="Microsoft Yi Baiti"/>
+        <a:font script="Tibt" typeface="Microsoft Himalaya"/>
+        <a:font script="Thaa" typeface="MV Boli"/>
+        <a:font script="Deva" typeface="Mangal"/>
+        <a:font script="Telu" typeface="Gautami"/>
+        <a:font script="Taml" typeface="Latha"/>
+        <a:font script="Syrc" typeface="Estrangelo Edessa"/>
+        <a:font script="Orya" typeface="Kalinga"/>
+        <a:font script="Mlym" typeface="Kartika"/>
+        <a:font script="Laoo" typeface="DokChampa"/>
+        <a:font script="Sinh" typeface="Iskoola Pota"/>
+        <a:font script="Mong" typeface="Mongolian Baiti"/>
+        <a:font script="Viet" typeface="Times New Roman"/>
+        <a:font script="Uigh" typeface="Microsoft Uighur"/>
+        <a:font script="Geor" typeface="Sylfaen"/>
+        <a:font script="Armn" typeface="Arial"/>
+        <a:font script="Bugi" typeface="Leelawadee UI"/>
+        <a:font script="Bopo" typeface="Microsoft JhengHei"/>
+        <a:font script="Java" typeface="Javanese Text"/>
+        <a:font script="Lisu" typeface="Segoe UI"/>
+        <a:font script="Mymr" typeface="Myanmar Text"/>
+        <a:font script="Nkoo" typeface="Ebrima"/>
+        <a:font script="Olck" typeface="Nirmala UI"/>
+        <a:font script="Osma" typeface="Ebrima"/>
+        <a:font script="Phag" typeface="Phagspa"/>
+        <a:font script="Syrn" typeface="Estrangelo Edessa"/>
+        <a:font script="Syrj" typeface="Estrangelo Edessa"/>
+        <a:font script="Syre" typeface="Estrangelo Edessa"/>
+        <a:font script="Sora" typeface="Nirmala UI"/>
+        <a:font script="Tale" typeface="Microsoft Tai Le"/>
+        <a:font script="Talu" typeface="Microsoft New Tai Lue"/>
+        <a:font script="Tfng" typeface="Ebrima"/>
+      </a:majorFont>
+      <a:minorFont>
+        <a:latin typeface="Aptos" panose="02110004020202020204"/>
+        <a:ea typeface=""/>
+        <a:cs typeface=""/>
+        <a:font script="Jpan" typeface="游ゴシック"/>
+        <a:font script="Hang" typeface="맑은 고딕"/>
+        <a:font script="Hans" typeface="等线"/>
+        <a:font script="Hant" typeface="新細明體"/>
+        <a:font script="Arab" typeface="Arial"/>
+        <a:font script="Hebr" typeface="Arial"/>
+        <a:font script="Thai" typeface="Cordia New"/>
+        <a:font script="Ethi" typeface="Nyala"/>
+        <a:font script="Beng" typeface="Vrinda"/>
+        <a:font script="Gujr" typeface="Shruti"/>
+        <a:font script="Khmr" typeface="DaunPenh"/>
+        <a:font script="Knda" typeface="Tunga"/>
+        <a:font script="Guru" typeface="Raavi"/>
+        <a:font script="Cans" typeface="Euphemia"/>
+        <a:font script="Cher" typeface="Plantagenet Cherokee"/>
+        <a:font script="Yiii" typeface="Microsoft Yi Baiti"/>
+        <a:font script="Tibt" typeface="Microsoft Himalaya"/>
+        <a:font script="Thaa" typeface="MV Boli"/>
+        <a:font script="Deva" typeface="Mangal"/>
+        <a:font script="Telu" typeface="Gautami"/>
+        <a:font script="Taml" typeface="Latha"/>
+        <a:font script="Syrc" typeface="Estrangelo Edessa"/>
+        <a:font script="Orya" typeface="Kalinga"/>
+        <a:font script="Mlym" typeface="Kartika"/>
+        <a:font script="Laoo" typeface="DokChampa"/>
+        <a:font script="Sinh" typeface="Iskoola Pota"/>
+        <a:font script="Mong" typeface="Mongolian Baiti"/>
+        <a:font script="Viet" typeface="Arial"/>
+        <a:font script="Uigh" typeface="Microsoft Uighur"/>
+        <a:font script="Geor" typeface="Sylfaen"/>
+        <a:font script="Armn" typeface="Arial"/>
+        <a:font script="Bugi" typeface="Leelawadee UI"/>
+        <a:font script="Bopo" typeface="Microsoft JhengHei"/>
+        <a:font script="Java" typeface="Javanese Text"/>
+        <a:font script="Lisu" typeface="Segoe UI"/>
+        <a:font script="Mymr" typeface="Myanmar Text"/>
+        <a:font script="Nkoo" typeface="Ebrima"/>
+        <a:font script="Olck" typeface="Nirmala UI"/>
+        <a:font script="Osma" typeface="Ebrima"/>
+        <a:font script="Phag" typeface="Phagspa"/>
+        <a:font script="Syrn" typeface="Estrangelo Edessa"/>
+        <a:font script="Syrj" typeface="Estrangelo Edessa"/>
+        <a:font script="Syre" typeface="Estrangelo Edessa"/>
+        <a:font script="Sora" typeface="Nirmala UI"/>
+        <a:font script="Tale" typeface="Microsoft Tai Le"/>
+        <a:font script="Talu" typeface="Microsoft New Tai Lue"/>
+        <a:font script="Tfng" typeface="Ebrima"/>
+      </a:minorFont>
+    </a:fontScheme>
+    <a:fmtScheme name="Office">
+      <a:fillStyleLst>
+        <a:solidFill>
+          <a:schemeClr val="phClr"/>
+        </a:solidFill>
+        <a:gradFill rotWithShape="1">
+          <a:gsLst>
+            <a:gs pos="0">
+              <a:schemeClr val="phClr">
+                <a:lumMod val="110000"/>
+                <a:satMod val="105000"/>
+                <a:tint val="67000"/>
+              </a:schemeClr>
+            </a:gs>
+            <a:gs pos="50000">
+              <a:schemeClr val="phClr">
+                <a:lumMod val="105000"/>
+                <a:satMod val="103000"/>
+                <a:tint val="73000"/>
+              </a:schemeClr>
+            </a:gs>
+            <a:gs pos="100000">
+              <a:schemeClr val="phClr">
+                <a:lumMod val="105000"/>
+                <a:satMod val="109000"/>
+                <a:tint val="81000"/>
+              </a:schemeClr>
+            </a:gs>
+          </a:gsLst>
+          <a:lin ang="5400000" scaled="0"/>
+        </a:gradFill>
+        <a:gradFill rotWithShape="1">
+          <a:gsLst>
+            <a:gs pos="0">
+              <a:schemeClr val="phClr">
+                <a:satMod val="103000"/>
+                <a:lumMod val="102000"/>
+                <a:tint val="94000"/>
+              </a:schemeClr>
+            </a:gs>
+            <a:gs pos="50000">
+              <a:schemeClr val="phClr">
+                <a:satMod val="110000"/>
+                <a:lumMod val="100000"/>
+                <a:shade val="100000"/>
+              </a:schemeClr>
+            </a:gs>
+            <a:gs pos="100000">
+              <a:schemeClr val="phClr">
+                <a:lumMod val="99000"/>
+                <a:satMod val="120000"/>
+                <a:shade val="78000"/>
+              </a:schemeClr>
+            </a:gs>
+          </a:gsLst>
+          <a:lin ang="5400000" scaled="0"/>
+        </a:gradFill>
+      </a:fillStyleLst>
+      <a:lnStyleLst>
+        <a:ln w="12700" cap="flat" cmpd="sng" algn="ctr">
+          <a:solidFill>
+            <a:schemeClr val="phClr"/>
+          </a:solidFill>
+          <a:prstDash val="solid"/>
+          <a:miter lim="800000"/>
+        </a:ln>
+        <a:ln w="19050" cap="flat" cmpd="sng" algn="ctr">
+          <a:solidFill>
+            <a:schemeClr val="phClr"/>
+          </a:solidFill>
+          <a:prstDash val="solid"/>
+          <a:miter lim="800000"/>
+        </a:ln>
+        <a:ln w="25400" cap="flat" cmpd="sng" algn="ctr">
+          <a:solidFill>
+            <a:schemeClr val="phClr"/>
+          </a:solidFill>
+          <a:prstDash val="solid"/>
+          <a:miter lim="800000"/>
+        </a:ln>
+      </a:lnStyleLst>
+      <a:effectStyleLst>
+        <a:effectStyle>
+          <a:effectLst/>
+        </a:effectStyle>
+        <a:effectStyle>
+          <a:effectLst/>
+        </a:effectStyle>
+        <a:effectStyle>
+          <a:effectLst>
+            <a:outerShdw blurRad="57150" dist="19050" dir="5400000" algn="ctr" rotWithShape="0">
+              <a:srgbClr val="000000">
+                <a:alpha val="63000"/>
+              </a:srgbClr>
+            </a:outerShdw>
+          </a:effectLst>
+        </a:effectStyle>
+      </a:effectStyleLst>
+      <a:bgFillStyleLst>
+        <a:solidFill>
+          <a:schemeClr val="phClr"/>
+        </a:solidFill>
+        <a:solidFill>
+          <a:schemeClr val="phClr">
+            <a:tint val="95000"/>
+            <a:satMod val="170000"/>
+          </a:schemeClr>
+        </a:solidFill>
+        <a:gradFill rotWithShape="1">
+          <a:gsLst>
+            <a:gs pos="0">
+              <a:schemeClr val="phClr">
+                <a:tint val="93000"/>
+                <a:satMod val="150000"/>
+                <a:shade val="98000"/>
+                <a:lumMod val="102000"/>
+              </a:schemeClr>
+            </a:gs>
+            <a:gs pos="50000">
+              <a:schemeClr val="phClr">
+                <a:tint val="98000"/>
+                <a:satMod val="130000"/>
+                <a:shade val="90000"/>
+                <a:lumMod val="103000"/>
+              </a:schemeClr>
+            </a:gs>
+            <a:gs pos="100000">
+              <a:schemeClr val="phClr">
+                <a:shade val="63000"/>
+                <a:satMod val="120000"/>
+              </a:schemeClr>
+            </a:gs>
+          </a:gsLst>
+          <a:lin ang="5400000" scaled="0"/>
+        </a:gradFill>
+      </a:bgFillStyleLst>
+    </a:fmtScheme>
+  </a:themeElements>
+  <a:objectDefaults>
+    <a:lnDef>
+      <a:spPr/>
+      <a:bodyPr/>
+      <a:lstStyle/>
+      <a:style>
+        <a:lnRef idx="2">
+          <a:schemeClr val="accent1"/>
+        </a:lnRef>
+        <a:fillRef idx="0">
+          <a:schemeClr val="accent1"/>
+        </a:fillRef>
+        <a:effectRef idx="1">
+          <a:schemeClr val="accent1"/>
+        </a:effectRef>
+        <a:fontRef idx="minor">
+          <a:schemeClr val="tx1"/>
+        </a:fontRef>
+      </a:style>
+    </a:lnDef>
+  </a:objectDefaults>
+  <a:extraClrSchemeLst/>
+  <a:extLst>
+    <a:ext uri="{05A4C25C-085E-4340-85A3-A5531E510DB2}">
+      <thm15:themeFamily xmlns:thm15="http://schemas.microsoft.com/office/thememl/2012/main" name="Office Theme" id="{2E142A2C-CD16-42D6-873A-C26D2A0506FA}" vid="{1BDDFF52-6CD6-40A5-AB3C-68EB2F1E4D0A}"/>
+    </a:ext>
+  </a:extLst>
+</a:theme>
 </file>
--- a/docs/20260430-nucleo-pin-configurations-l4-h2.pptx
+++ b/docs/20260430-nucleo-pin-configurations-l4-h2.pptx
@@ -198,7 +198,7 @@
           <a:p>
             <a:fld id="{82539491-0F25-4D6B-BCFC-C1CECD0BE112}" type="datetimeFigureOut">
               <a:rPr lang="en-US" smtClean="0"/>
-              <a:t>5/13/2026</a:t>
+              <a:t>5/18/2026</a:t>
             </a:fld>
             <a:endParaRPr lang="en-US"/>
           </a:p>
@@ -804,7 +804,7 @@
           <a:p>
             <a:fld id="{B8B67C60-164F-4645-BD88-C03E7D28266F}" type="datetimeFigureOut">
               <a:rPr lang="en-US" smtClean="0"/>
-              <a:t>5/13/2026</a:t>
+              <a:t>5/18/2026</a:t>
             </a:fld>
             <a:endParaRPr lang="en-US"/>
           </a:p>
@@ -1002,7 +1002,7 @@
           <a:p>
             <a:fld id="{B8B67C60-164F-4645-BD88-C03E7D28266F}" type="datetimeFigureOut">
               <a:rPr lang="en-US" smtClean="0"/>
-              <a:t>5/13/2026</a:t>
+              <a:t>5/18/2026</a:t>
             </a:fld>
             <a:endParaRPr lang="en-US"/>
           </a:p>
@@ -1210,7 +1210,7 @@
           <a:p>
             <a:fld id="{B8B67C60-164F-4645-BD88-C03E7D28266F}" type="datetimeFigureOut">
               <a:rPr lang="en-US" smtClean="0"/>
-              <a:t>5/13/2026</a:t>
+              <a:t>5/18/2026</a:t>
             </a:fld>
             <a:endParaRPr lang="en-US"/>
           </a:p>
@@ -1408,7 +1408,7 @@
           <a:p>
             <a:fld id="{B8B67C60-164F-4645-BD88-C03E7D28266F}" type="datetimeFigureOut">
               <a:rPr lang="en-US" smtClean="0"/>
-              <a:t>5/13/2026</a:t>
+              <a:t>5/18/2026</a:t>
             </a:fld>
             <a:endParaRPr lang="en-US"/>
           </a:p>
@@ -1683,7 +1683,7 @@
           <a:p>
             <a:fld id="{B8B67C60-164F-4645-BD88-C03E7D28266F}" type="datetimeFigureOut">
               <a:rPr lang="en-US" smtClean="0"/>
-              <a:t>5/13/2026</a:t>
+              <a:t>5/18/2026</a:t>
             </a:fld>
             <a:endParaRPr lang="en-US"/>
           </a:p>
@@ -1948,7 +1948,7 @@
           <a:p>
             <a:fld id="{B8B67C60-164F-4645-BD88-C03E7D28266F}" type="datetimeFigureOut">
               <a:rPr lang="en-US" smtClean="0"/>
-              <a:t>5/13/2026</a:t>
+              <a:t>5/18/2026</a:t>
             </a:fld>
             <a:endParaRPr lang="en-US"/>
           </a:p>
@@ -2360,7 +2360,7 @@
           <a:p>
             <a:fld id="{B8B67C60-164F-4645-BD88-C03E7D28266F}" type="datetimeFigureOut">
               <a:rPr lang="en-US" smtClean="0"/>
-              <a:t>5/13/2026</a:t>
+              <a:t>5/18/2026</a:t>
             </a:fld>
             <a:endParaRPr lang="en-US"/>
           </a:p>
@@ -2501,7 +2501,7 @@
           <a:p>
             <a:fld id="{B8B67C60-164F-4645-BD88-C03E7D28266F}" type="datetimeFigureOut">
               <a:rPr lang="en-US" smtClean="0"/>
-              <a:t>5/13/2026</a:t>
+              <a:t>5/18/2026</a:t>
             </a:fld>
             <a:endParaRPr lang="en-US"/>
           </a:p>
@@ -2614,7 +2614,7 @@
           <a:p>
             <a:fld id="{B8B67C60-164F-4645-BD88-C03E7D28266F}" type="datetimeFigureOut">
               <a:rPr lang="en-US" smtClean="0"/>
-              <a:t>5/13/2026</a:t>
+              <a:t>5/18/2026</a:t>
             </a:fld>
             <a:endParaRPr lang="en-US"/>
           </a:p>
@@ -2925,7 +2925,7 @@
           <a:p>
             <a:fld id="{B8B67C60-164F-4645-BD88-C03E7D28266F}" type="datetimeFigureOut">
               <a:rPr lang="en-US" smtClean="0"/>
-              <a:t>5/13/2026</a:t>
+              <a:t>5/18/2026</a:t>
             </a:fld>
             <a:endParaRPr lang="en-US"/>
           </a:p>
@@ -3213,7 +3213,7 @@
           <a:p>
             <a:fld id="{B8B67C60-164F-4645-BD88-C03E7D28266F}" type="datetimeFigureOut">
               <a:rPr lang="en-US" smtClean="0"/>
-              <a:t>5/13/2026</a:t>
+              <a:t>5/18/2026</a:t>
             </a:fld>
             <a:endParaRPr lang="en-US"/>
           </a:p>
@@ -3454,7 +3454,7 @@
           <a:p>
             <a:fld id="{B8B67C60-164F-4645-BD88-C03E7D28266F}" type="datetimeFigureOut">
               <a:rPr lang="en-US" smtClean="0"/>
-              <a:t>5/13/2026</a:t>
+              <a:t>5/18/2026</a:t>
             </a:fld>
             <a:endParaRPr lang="en-US"/>
           </a:p>
@@ -6386,7 +6386,7 @@
         </p:nvSpPr>
         <p:spPr>
           <a:xfrm>
-            <a:off x="3992341" y="3627492"/>
+            <a:off x="3992340" y="3639864"/>
             <a:ext cx="417896" cy="192505"/>
           </a:xfrm>
           <a:prstGeom prst="rect">
@@ -6438,7 +6438,7 @@
         </p:nvSpPr>
         <p:spPr>
           <a:xfrm>
-            <a:off x="5163181" y="3655397"/>
+            <a:off x="5197198" y="3672032"/>
             <a:ext cx="417896" cy="192505"/>
           </a:xfrm>
           <a:prstGeom prst="rect">
@@ -7020,8 +7020,8 @@
         </p:nvSpPr>
         <p:spPr>
           <a:xfrm>
-            <a:off x="8653849" y="3136199"/>
-            <a:ext cx="444844" cy="367930"/>
+            <a:off x="8829575" y="3186711"/>
+            <a:ext cx="245982" cy="297414"/>
           </a:xfrm>
           <a:prstGeom prst="rect">
             <a:avLst/>
@@ -7073,7 +7073,7 @@
         </p:nvSpPr>
         <p:spPr>
           <a:xfrm>
-            <a:off x="4704208" y="4931850"/>
+            <a:off x="4704208" y="4925684"/>
             <a:ext cx="1146031" cy="243930"/>
           </a:xfrm>
           <a:prstGeom prst="rect">
@@ -7124,7 +7124,7 @@
         </p:nvSpPr>
         <p:spPr>
           <a:xfrm>
-            <a:off x="4081857" y="4173320"/>
+            <a:off x="3756997" y="4140833"/>
             <a:ext cx="1146032" cy="243930"/>
           </a:xfrm>
           <a:prstGeom prst="rect">
@@ -7271,8 +7271,8 @@
         </p:nvSpPr>
         <p:spPr>
           <a:xfrm>
-            <a:off x="8286688" y="2856993"/>
-            <a:ext cx="1162438" cy="243930"/>
+            <a:off x="8585042" y="2888254"/>
+            <a:ext cx="795277" cy="243930"/>
           </a:xfrm>
           <a:prstGeom prst="rect">
             <a:avLst/>
@@ -7303,7 +7303,7 @@
           <a:p>
             <a:r>
               <a:rPr lang="en-US" sz="1200" dirty="0"/>
-              <a:t>LD1, LD2, LD3</a:t>
+              <a:t>LD2, LD3</a:t>
             </a:r>
           </a:p>
         </p:txBody>
@@ -7416,7 +7416,7 @@
         </p:nvCxnSpPr>
         <p:spPr>
           <a:xfrm flipV="1">
-            <a:off x="5277224" y="4477932"/>
+            <a:off x="5277224" y="4471766"/>
             <a:ext cx="196740" cy="453918"/>
           </a:xfrm>
           <a:prstGeom prst="straightConnector1">
@@ -7461,8 +7461,8 @@
         </p:nvCxnSpPr>
         <p:spPr>
           <a:xfrm>
-            <a:off x="5227889" y="4281936"/>
-            <a:ext cx="208447" cy="19884"/>
+            <a:off x="4927904" y="4342423"/>
+            <a:ext cx="478242" cy="0"/>
           </a:xfrm>
           <a:prstGeom prst="straightConnector1">
             <a:avLst/>
@@ -7582,6 +7582,110 @@
           </a:fontRef>
         </p:style>
       </p:cxnSp>
+      <p:sp>
+        <p:nvSpPr>
+          <p:cNvPr id="6" name="Rectangle 5">
+            <a:extLst>
+              <a:ext uri="{FF2B5EF4-FFF2-40B4-BE49-F238E27FC236}">
+                <a16:creationId xmlns:a16="http://schemas.microsoft.com/office/drawing/2014/main" id="{131F0D5A-A915-FF3D-C025-FD418D2543DF}"/>
+              </a:ext>
+            </a:extLst>
+          </p:cNvPr>
+          <p:cNvSpPr/>
+          <p:nvPr/>
+        </p:nvSpPr>
+        <p:spPr>
+          <a:xfrm>
+            <a:off x="5020933" y="4103061"/>
+            <a:ext cx="184654" cy="172411"/>
+          </a:xfrm>
+          <a:prstGeom prst="rect">
+            <a:avLst/>
+          </a:prstGeom>
+          <a:noFill/>
+          <a:ln w="38100">
+            <a:solidFill>
+              <a:schemeClr val="accent5"/>
+            </a:solidFill>
+            <a:prstDash val="sysDash"/>
+          </a:ln>
+        </p:spPr>
+        <p:style>
+          <a:lnRef idx="2">
+            <a:schemeClr val="accent1">
+              <a:shade val="15000"/>
+            </a:schemeClr>
+          </a:lnRef>
+          <a:fillRef idx="1">
+            <a:schemeClr val="accent1"/>
+          </a:fillRef>
+          <a:effectRef idx="0">
+            <a:schemeClr val="accent1"/>
+          </a:effectRef>
+          <a:fontRef idx="minor">
+            <a:schemeClr val="lt1"/>
+          </a:fontRef>
+        </p:style>
+        <p:txBody>
+          <a:bodyPr rtlCol="0" anchor="ctr"/>
+          <a:lstStyle/>
+          <a:p>
+            <a:pPr algn="ctr"/>
+            <a:endParaRPr lang="en-US" sz="1600"/>
+          </a:p>
+        </p:txBody>
+      </p:sp>
+      <p:sp>
+        <p:nvSpPr>
+          <p:cNvPr id="14" name="Rectangle 13">
+            <a:extLst>
+              <a:ext uri="{FF2B5EF4-FFF2-40B4-BE49-F238E27FC236}">
+                <a16:creationId xmlns:a16="http://schemas.microsoft.com/office/drawing/2014/main" id="{0C6CBD5C-B532-D200-BF8E-67AF3999E616}"/>
+              </a:ext>
+            </a:extLst>
+          </p:cNvPr>
+          <p:cNvSpPr/>
+          <p:nvPr/>
+        </p:nvSpPr>
+        <p:spPr>
+          <a:xfrm>
+            <a:off x="4539074" y="3869718"/>
+            <a:ext cx="451951" cy="243930"/>
+          </a:xfrm>
+          <a:prstGeom prst="rect">
+            <a:avLst/>
+          </a:prstGeom>
+          <a:solidFill>
+            <a:srgbClr val="A02B93"/>
+          </a:solidFill>
+        </p:spPr>
+        <p:style>
+          <a:lnRef idx="2">
+            <a:schemeClr val="accent1">
+              <a:shade val="15000"/>
+            </a:schemeClr>
+          </a:lnRef>
+          <a:fillRef idx="1">
+            <a:schemeClr val="accent1"/>
+          </a:fillRef>
+          <a:effectRef idx="0">
+            <a:schemeClr val="accent1"/>
+          </a:effectRef>
+          <a:fontRef idx="minor">
+            <a:schemeClr val="lt1"/>
+          </a:fontRef>
+        </p:style>
+        <p:txBody>
+          <a:bodyPr rtlCol="0" anchor="ctr"/>
+          <a:lstStyle/>
+          <a:p>
+            <a:r>
+              <a:rPr lang="en-US" sz="1200" dirty="0"/>
+              <a:t>LD2</a:t>
+            </a:r>
+          </a:p>
+        </p:txBody>
+      </p:sp>
     </p:spTree>
     <p:extLst>
       <p:ext uri="{BB962C8B-B14F-4D97-AF65-F5344CB8AC3E}">
